--- a/Transporte_y_Logistica_Transhumanismo.pptx
+++ b/Transporte_y_Logistica_Transhumanismo.pptx
@@ -13,12 +13,9 @@
     <p:sldId id="261" r:id="rId7"/>
     <p:sldId id="262" r:id="rId8"/>
     <p:sldId id="263" r:id="rId9"/>
-    <p:sldId id="264" r:id="rId10"/>
-    <p:sldId id="265" r:id="rId11"/>
-    <p:sldId id="266" r:id="rId12"/>
   </p:sldIdLst>
   <p:notesMasterIdLst>
-    <p:notesMasterId r:id="rId13"/>
+    <p:notesMasterId r:id="rId10"/>
   </p:notesMasterIdLst>
   <p:sldSz cx="9144000" cy="5143500"/>
   <p:notesSz cx="5143500" cy="9144000"/>
@@ -117,31 +114,28 @@
   <p:extLst>
     <p:ext uri="{521415D9-36F7-43E2-AB2F-B90AF26B5E84}">
       <p14:sectionLst xmlns:p14="http://schemas.microsoft.com/office/powerpoint/2010/main">
-        <p14:section name="Introducción" id="{0d484735-48da-d5ca-d510-05d71371ed60}">
+        <p14:section name="Introducción" id="{fbbcd674-6010-fa94-1499-acafb0217f00}">
           <p14:sldIdLst>
             <p14:sldId id="256"/>
             <p14:sldId id="257"/>
           </p14:sldIdLst>
         </p14:section>
-        <p14:section name="Preguntas centrales" id="{5a23d49d-9064-d705-fe0d-339bb7f18f05}">
+        <p14:section name="Preguntas centrales" id="{63914371-bb7c-0130-66e9-f0d8193a5ad3}">
           <p14:sldIdLst>
             <p14:sldId id="258"/>
+          </p14:sldIdLst>
+        </p14:section>
+        <p14:section name="Análisis" id="{38426df4-c8e0-fdf0-0385-58336b10c1f4}">
+          <p14:sldIdLst>
             <p14:sldId id="259"/>
             <p14:sldId id="260"/>
             <p14:sldId id="261"/>
           </p14:sldIdLst>
         </p14:section>
-        <p14:section name="Análisis" id="{7a647f1b-3fca-9a17-7ad1-12838ca3eb67}">
+        <p14:section name="Conclusión" id="{5438afa6-dde9-d4f6-91c5-9f06b1534489}">
           <p14:sldIdLst>
             <p14:sldId id="262"/>
             <p14:sldId id="263"/>
-            <p14:sldId id="264"/>
-          </p14:sldIdLst>
-        </p14:section>
-        <p14:section name="Conclusión" id="{4aebc8aa-a6ca-dc63-26b4-4b9a22d75425}">
-          <p14:sldIdLst>
-            <p14:sldId id="265"/>
-            <p14:sldId id="266"/>
           </p14:sldIdLst>
         </p14:section>
       </p14:sectionLst>
@@ -590,182 +584,6 @@
 </p:notes>
 </file>
 
-<file path=ppt/notesSlides/notesSlide10.xml><?xml version="1.0" encoding="utf-8"?>
-<p:notes xmlns:a="http://schemas.openxmlformats.org/drawingml/2006/main" xmlns:r="http://schemas.openxmlformats.org/officeDocument/2006/relationships" xmlns:p="http://schemas.openxmlformats.org/presentationml/2006/main">
-  <p:cSld>
-    <p:spTree>
-      <p:nvGrpSpPr>
-        <p:cNvPr id="1" name=""/>
-        <p:cNvGrpSpPr/>
-        <p:nvPr/>
-      </p:nvGrpSpPr>
-      <p:grpSpPr>
-        <a:xfrm>
-          <a:off x="0" y="0"/>
-          <a:ext cx="0" cy="0"/>
-          <a:chOff x="0" y="0"/>
-          <a:chExt cx="0" cy="0"/>
-        </a:xfrm>
-      </p:grpSpPr>
-      <p:sp>
-        <p:nvSpPr>
-          <p:cNvPr id="2" name="Slide Image Placeholder 1"/>
-          <p:cNvSpPr>
-            <a:spLocks noGrp="1" noRot="1" noChangeAspect="1"/>
-          </p:cNvSpPr>
-          <p:nvPr>
-            <p:ph type="sldImg"/>
-          </p:nvPr>
-        </p:nvSpPr>
-        <p:spPr/>
-      </p:sp>
-      <p:sp>
-        <p:nvSpPr>
-          <p:cNvPr id="3" name="Notes Placeholder 2"/>
-          <p:cNvSpPr>
-            <a:spLocks noGrp="1"/>
-          </p:cNvSpPr>
-          <p:nvPr>
-            <p:ph type="body" idx="1"/>
-          </p:nvPr>
-        </p:nvSpPr>
-        <p:spPr/>
-        <p:txBody>
-          <a:bodyPr/>
-          <a:lstStyle/>
-          <a:p>
-            <a:r>
-              <a:rPr lang="en-US" dirty="0"/>
-              <a:t/>
-            </a:r>
-            <a:endParaRPr lang="en-US" dirty="0"/>
-          </a:p>
-        </p:txBody>
-      </p:sp>
-      <p:sp>
-        <p:nvSpPr>
-          <p:cNvPr id="4" name="Slide Number Placeholder 3"/>
-          <p:cNvSpPr>
-            <a:spLocks noGrp="1"/>
-          </p:cNvSpPr>
-          <p:nvPr>
-            <p:ph type="sldNum" sz="quarter" idx="10"/>
-          </p:nvPr>
-        </p:nvSpPr>
-        <p:spPr/>
-        <p:txBody>
-          <a:bodyPr/>
-          <a:lstStyle/>
-          <a:p>
-            <a:fld id="{F7021451-1387-4CA6-816F-3879F97B5CBC}" type="slidenum">
-              <a:rPr lang="en-US"/>
-              <a:t>10</a:t>
-            </a:fld>
-            <a:endParaRPr lang="en-US"/>
-          </a:p>
-        </p:txBody>
-      </p:sp>
-    </p:spTree>
-    <p:extLst>
-      <p:ext uri="{BB962C8B-B14F-4D97-AF65-F5344CB8AC3E}">
-        <p14:creationId xmlns:p14="http://schemas.microsoft.com/office/powerpoint/2010/main" val="1024086991"/>
-      </p:ext>
-    </p:extLst>
-  </p:cSld>
-  <p:clrMapOvr>
-    <a:masterClrMapping/>
-  </p:clrMapOvr>
-</p:notes>
-</file>
-
-<file path=ppt/notesSlides/notesSlide11.xml><?xml version="1.0" encoding="utf-8"?>
-<p:notes xmlns:a="http://schemas.openxmlformats.org/drawingml/2006/main" xmlns:r="http://schemas.openxmlformats.org/officeDocument/2006/relationships" xmlns:p="http://schemas.openxmlformats.org/presentationml/2006/main">
-  <p:cSld>
-    <p:spTree>
-      <p:nvGrpSpPr>
-        <p:cNvPr id="1" name=""/>
-        <p:cNvGrpSpPr/>
-        <p:nvPr/>
-      </p:nvGrpSpPr>
-      <p:grpSpPr>
-        <a:xfrm>
-          <a:off x="0" y="0"/>
-          <a:ext cx="0" cy="0"/>
-          <a:chOff x="0" y="0"/>
-          <a:chExt cx="0" cy="0"/>
-        </a:xfrm>
-      </p:grpSpPr>
-      <p:sp>
-        <p:nvSpPr>
-          <p:cNvPr id="2" name="Slide Image Placeholder 1"/>
-          <p:cNvSpPr>
-            <a:spLocks noGrp="1" noRot="1" noChangeAspect="1"/>
-          </p:cNvSpPr>
-          <p:nvPr>
-            <p:ph type="sldImg"/>
-          </p:nvPr>
-        </p:nvSpPr>
-        <p:spPr/>
-      </p:sp>
-      <p:sp>
-        <p:nvSpPr>
-          <p:cNvPr id="3" name="Notes Placeholder 2"/>
-          <p:cNvSpPr>
-            <a:spLocks noGrp="1"/>
-          </p:cNvSpPr>
-          <p:nvPr>
-            <p:ph type="body" idx="1"/>
-          </p:nvPr>
-        </p:nvSpPr>
-        <p:spPr/>
-        <p:txBody>
-          <a:bodyPr/>
-          <a:lstStyle/>
-          <a:p>
-            <a:r>
-              <a:rPr lang="en-US" dirty="0"/>
-              <a:t/>
-            </a:r>
-            <a:endParaRPr lang="en-US" dirty="0"/>
-          </a:p>
-        </p:txBody>
-      </p:sp>
-      <p:sp>
-        <p:nvSpPr>
-          <p:cNvPr id="4" name="Slide Number Placeholder 3"/>
-          <p:cNvSpPr>
-            <a:spLocks noGrp="1"/>
-          </p:cNvSpPr>
-          <p:nvPr>
-            <p:ph type="sldNum" sz="quarter" idx="10"/>
-          </p:nvPr>
-        </p:nvSpPr>
-        <p:spPr/>
-        <p:txBody>
-          <a:bodyPr/>
-          <a:lstStyle/>
-          <a:p>
-            <a:fld id="{F7021451-1387-4CA6-816F-3879F97B5CBC}" type="slidenum">
-              <a:rPr lang="en-US"/>
-              <a:t>11</a:t>
-            </a:fld>
-            <a:endParaRPr lang="en-US"/>
-          </a:p>
-        </p:txBody>
-      </p:sp>
-    </p:spTree>
-    <p:extLst>
-      <p:ext uri="{BB962C8B-B14F-4D97-AF65-F5344CB8AC3E}">
-        <p14:creationId xmlns:p14="http://schemas.microsoft.com/office/powerpoint/2010/main" val="1024086991"/>
-      </p:ext>
-    </p:extLst>
-  </p:cSld>
-  <p:clrMapOvr>
-    <a:masterClrMapping/>
-  </p:clrMapOvr>
-</p:notes>
-</file>
-
 <file path=ppt/notesSlides/notesSlide2.xml><?xml version="1.0" encoding="utf-8"?>
 <p:notes xmlns:a="http://schemas.openxmlformats.org/drawingml/2006/main" xmlns:r="http://schemas.openxmlformats.org/officeDocument/2006/relationships" xmlns:p="http://schemas.openxmlformats.org/presentationml/2006/main">
   <p:cSld>
@@ -1364,94 +1182,6 @@
             <a:fld id="{F7021451-1387-4CA6-816F-3879F97B5CBC}" type="slidenum">
               <a:rPr lang="en-US"/>
               <a:t>8</a:t>
-            </a:fld>
-            <a:endParaRPr lang="en-US"/>
-          </a:p>
-        </p:txBody>
-      </p:sp>
-    </p:spTree>
-    <p:extLst>
-      <p:ext uri="{BB962C8B-B14F-4D97-AF65-F5344CB8AC3E}">
-        <p14:creationId xmlns:p14="http://schemas.microsoft.com/office/powerpoint/2010/main" val="1024086991"/>
-      </p:ext>
-    </p:extLst>
-  </p:cSld>
-  <p:clrMapOvr>
-    <a:masterClrMapping/>
-  </p:clrMapOvr>
-</p:notes>
-</file>
-
-<file path=ppt/notesSlides/notesSlide9.xml><?xml version="1.0" encoding="utf-8"?>
-<p:notes xmlns:a="http://schemas.openxmlformats.org/drawingml/2006/main" xmlns:r="http://schemas.openxmlformats.org/officeDocument/2006/relationships" xmlns:p="http://schemas.openxmlformats.org/presentationml/2006/main">
-  <p:cSld>
-    <p:spTree>
-      <p:nvGrpSpPr>
-        <p:cNvPr id="1" name=""/>
-        <p:cNvGrpSpPr/>
-        <p:nvPr/>
-      </p:nvGrpSpPr>
-      <p:grpSpPr>
-        <a:xfrm>
-          <a:off x="0" y="0"/>
-          <a:ext cx="0" cy="0"/>
-          <a:chOff x="0" y="0"/>
-          <a:chExt cx="0" cy="0"/>
-        </a:xfrm>
-      </p:grpSpPr>
-      <p:sp>
-        <p:nvSpPr>
-          <p:cNvPr id="2" name="Slide Image Placeholder 1"/>
-          <p:cNvSpPr>
-            <a:spLocks noGrp="1" noRot="1" noChangeAspect="1"/>
-          </p:cNvSpPr>
-          <p:nvPr>
-            <p:ph type="sldImg"/>
-          </p:nvPr>
-        </p:nvSpPr>
-        <p:spPr/>
-      </p:sp>
-      <p:sp>
-        <p:nvSpPr>
-          <p:cNvPr id="3" name="Notes Placeholder 2"/>
-          <p:cNvSpPr>
-            <a:spLocks noGrp="1"/>
-          </p:cNvSpPr>
-          <p:nvPr>
-            <p:ph type="body" idx="1"/>
-          </p:nvPr>
-        </p:nvSpPr>
-        <p:spPr/>
-        <p:txBody>
-          <a:bodyPr/>
-          <a:lstStyle/>
-          <a:p>
-            <a:r>
-              <a:rPr lang="en-US" dirty="0"/>
-              <a:t/>
-            </a:r>
-            <a:endParaRPr lang="en-US" dirty="0"/>
-          </a:p>
-        </p:txBody>
-      </p:sp>
-      <p:sp>
-        <p:nvSpPr>
-          <p:cNvPr id="4" name="Slide Number Placeholder 3"/>
-          <p:cNvSpPr>
-            <a:spLocks noGrp="1"/>
-          </p:cNvSpPr>
-          <p:nvPr>
-            <p:ph type="sldNum" sz="quarter" idx="10"/>
-          </p:nvPr>
-        </p:nvSpPr>
-        <p:spPr/>
-        <p:txBody>
-          <a:bodyPr/>
-          <a:lstStyle/>
-          <a:p>
-            <a:fld id="{F7021451-1387-4CA6-816F-3879F97B5CBC}" type="slidenum">
-              <a:rPr lang="en-US"/>
-              <a:t>9</a:t>
             </a:fld>
             <a:endParaRPr lang="en-US"/>
           </a:p>
@@ -2384,628 +2114,6 @@
 </p:sld>
 </file>
 
-<file path=ppt/slides/slide10.xml><?xml version="1.0" encoding="utf-8"?>
-<p:sld xmlns:a="http://schemas.openxmlformats.org/drawingml/2006/main" xmlns:r="http://schemas.openxmlformats.org/officeDocument/2006/relationships" xmlns:p="http://schemas.openxmlformats.org/presentationml/2006/main">
-  <p:cSld name="Slide 10">
-    <p:spTree>
-      <p:nvGrpSpPr>
-        <p:cNvPr id="1" name=""/>
-        <p:cNvGrpSpPr/>
-        <p:nvPr/>
-      </p:nvGrpSpPr>
-      <p:grpSpPr>
-        <a:xfrm>
-          <a:off x="0" y="0"/>
-          <a:ext cx="0" cy="0"/>
-          <a:chOff x="0" y="0"/>
-          <a:chExt cx="0" cy="0"/>
-        </a:xfrm>
-      </p:grpSpPr>
-      <p:sp>
-        <p:nvSpPr>
-          <p:cNvPr id="2" name="Text 0"/>
-          <p:cNvSpPr/>
-          <p:nvPr>
-            <p:ph idx="100" type="title" hasCustomPrompt="1"/>
-          </p:nvPr>
-        </p:nvSpPr>
-        <p:spPr>
-          <a:xfrm>
-            <a:off x="457200" y="274320"/>
-            <a:ext cx="8229600" cy="685800"/>
-          </a:xfrm>
-          <a:prstGeom prst="rect">
-            <a:avLst/>
-          </a:prstGeom>
-          <a:noFill/>
-          <a:ln/>
-        </p:spPr>
-        <p:txBody>
-          <a:bodyPr wrap="square" lIns="0" tIns="0" rIns="0" bIns="0" rtlCol="0" anchor="ctr"/>
-          <a:lstStyle/>
-          <a:p>
-            <a:pPr algn="ctr" indent="0" marL="0">
-              <a:buNone/>
-            </a:pPr>
-            <a:r>
-              <a:rPr lang="en-US" sz="2800" b="1" dirty="0">
-                <a:solidFill>
-                  <a:schemeClr val="bg1"/>
-                </a:solidFill>
-              </a:rPr>
-              <a:t>Postura del equipo</a:t>
-            </a:r>
-            <a:endParaRPr lang="en-US" sz="2800" dirty="0"/>
-          </a:p>
-        </p:txBody>
-      </p:sp>
-      <p:pic>
-        <p:nvPicPr>
-          <p:cNvPr id="3" name="Image 0" descr="preencoded.png">    </p:cNvPr>
-          <p:cNvPicPr>
-            <a:picLocks noChangeAspect="1"/>
-          </p:cNvPicPr>
-          <p:nvPr/>
-        </p:nvPicPr>
-        <p:blipFill>
-          <a:blip r:embed="rId1"/>
-          <a:stretch>
-            <a:fillRect/>
-          </a:stretch>
-        </p:blipFill>
-        <p:spPr>
-          <a:xfrm>
-            <a:off x="4023360" y="1051560"/>
-            <a:ext cx="1097280" cy="1097280"/>
-          </a:xfrm>
-          <a:prstGeom prst="rect">
-            <a:avLst/>
-          </a:prstGeom>
-        </p:spPr>
-      </p:pic>
-      <p:sp>
-        <p:nvSpPr>
-          <p:cNvPr id="4" name="Shape 1"/>
-          <p:cNvSpPr/>
-          <p:nvPr/>
-        </p:nvSpPr>
-        <p:spPr>
-          <a:xfrm>
-            <a:off x="457200" y="2331720"/>
-            <a:ext cx="3840480" cy="1417320"/>
-          </a:xfrm>
-          <a:prstGeom prst="roundRect">
-            <a:avLst>
-              <a:gd name="adj" fmla="val 7742"/>
-            </a:avLst>
-          </a:prstGeom>
-          <a:solidFill>
-            <a:schemeClr val="accent4"/>
-          </a:solidFill>
-          <a:ln/>
-        </p:spPr>
-      </p:sp>
-      <p:sp>
-        <p:nvSpPr>
-          <p:cNvPr id="5" name="Text 2"/>
-          <p:cNvSpPr txBox="1"/>
-          <p:nvPr/>
-        </p:nvSpPr>
-        <p:spPr>
-          <a:xfrm>
-            <a:off x="731520" y="2468880"/>
-            <a:ext cx="3291840" cy="411480"/>
-          </a:xfrm>
-          <a:prstGeom prst="rect">
-            <a:avLst/>
-          </a:prstGeom>
-          <a:noFill/>
-          <a:ln/>
-        </p:spPr>
-        <p:txBody>
-          <a:bodyPr wrap="square" lIns="0" tIns="0" rIns="0" bIns="0" rtlCol="0" anchor="t"/>
-          <a:lstStyle/>
-          <a:p>
-            <a:pPr indent="0" marL="0">
-              <a:buNone/>
-            </a:pPr>
-            <a:r>
-              <a:rPr lang="en-US" sz="2000" b="1" dirty="0">
-                <a:solidFill>
-                  <a:schemeClr val="bg1"/>
-                </a:solidFill>
-              </a:rPr>
-              <a:t>Fortalece</a:t>
-            </a:r>
-            <a:endParaRPr lang="en-US" sz="2000" dirty="0"/>
-          </a:p>
-        </p:txBody>
-      </p:sp>
-      <p:sp>
-        <p:nvSpPr>
-          <p:cNvPr id="6" name="Text 3"/>
-          <p:cNvSpPr txBox="1"/>
-          <p:nvPr/>
-        </p:nvSpPr>
-        <p:spPr>
-          <a:xfrm>
-            <a:off x="731520" y="2926080"/>
-            <a:ext cx="3291840" cy="731520"/>
-          </a:xfrm>
-          <a:prstGeom prst="rect">
-            <a:avLst/>
-          </a:prstGeom>
-          <a:noFill/>
-          <a:ln/>
-        </p:spPr>
-        <p:txBody>
-          <a:bodyPr wrap="square" lIns="0" tIns="0" rIns="0" bIns="0" rtlCol="0" anchor="t"/>
-          <a:lstStyle/>
-          <a:p>
-            <a:pPr indent="0" marL="0">
-              <a:buNone/>
-            </a:pPr>
-            <a:r>
-              <a:rPr lang="en-US" sz="1400" dirty="0">
-                <a:solidFill>
-                  <a:schemeClr val="bg1"/>
-                </a:solidFill>
-              </a:rPr>
-              <a:t>La eficiencia, la rentabilidad y la especialización técnica del sector logístico.</a:t>
-            </a:r>
-            <a:endParaRPr lang="en-US" sz="1400" dirty="0"/>
-          </a:p>
-        </p:txBody>
-      </p:sp>
-      <p:sp>
-        <p:nvSpPr>
-          <p:cNvPr id="7" name="Shape 4"/>
-          <p:cNvSpPr/>
-          <p:nvPr/>
-        </p:nvSpPr>
-        <p:spPr>
-          <a:xfrm>
-            <a:off x="4846320" y="2331720"/>
-            <a:ext cx="3840480" cy="1417320"/>
-          </a:xfrm>
-          <a:prstGeom prst="roundRect">
-            <a:avLst>
-              <a:gd name="adj" fmla="val 7742"/>
-            </a:avLst>
-          </a:prstGeom>
-          <a:solidFill>
-            <a:schemeClr val="accent3"/>
-          </a:solidFill>
-          <a:ln/>
-        </p:spPr>
-      </p:sp>
-      <p:sp>
-        <p:nvSpPr>
-          <p:cNvPr id="8" name="Text 5"/>
-          <p:cNvSpPr txBox="1"/>
-          <p:nvPr/>
-        </p:nvSpPr>
-        <p:spPr>
-          <a:xfrm>
-            <a:off x="5120640" y="2468880"/>
-            <a:ext cx="3291840" cy="411480"/>
-          </a:xfrm>
-          <a:prstGeom prst="rect">
-            <a:avLst/>
-          </a:prstGeom>
-          <a:noFill/>
-          <a:ln/>
-        </p:spPr>
-        <p:txBody>
-          <a:bodyPr wrap="square" lIns="0" tIns="0" rIns="0" bIns="0" rtlCol="0" anchor="t"/>
-          <a:lstStyle/>
-          <a:p>
-            <a:pPr indent="0" marL="0">
-              <a:buNone/>
-            </a:pPr>
-            <a:r>
-              <a:rPr lang="en-US" sz="2000" b="1" dirty="0">
-                <a:solidFill>
-                  <a:schemeClr val="bg1"/>
-                </a:solidFill>
-              </a:rPr>
-              <a:t>Amenaza</a:t>
-            </a:r>
-            <a:endParaRPr lang="en-US" sz="2000" dirty="0"/>
-          </a:p>
-        </p:txBody>
-      </p:sp>
-      <p:sp>
-        <p:nvSpPr>
-          <p:cNvPr id="9" name="Text 6"/>
-          <p:cNvSpPr txBox="1"/>
-          <p:nvPr/>
-        </p:nvSpPr>
-        <p:spPr>
-          <a:xfrm>
-            <a:off x="5120640" y="2926080"/>
-            <a:ext cx="3291840" cy="731520"/>
-          </a:xfrm>
-          <a:prstGeom prst="rect">
-            <a:avLst/>
-          </a:prstGeom>
-          <a:noFill/>
-          <a:ln/>
-        </p:spPr>
-        <p:txBody>
-          <a:bodyPr wrap="square" lIns="0" tIns="0" rIns="0" bIns="0" rtlCol="0" anchor="t"/>
-          <a:lstStyle/>
-          <a:p>
-            <a:pPr indent="0" marL="0">
-              <a:buNone/>
-            </a:pPr>
-            <a:r>
-              <a:rPr lang="en-US" sz="1400" dirty="0">
-                <a:solidFill>
-                  <a:schemeClr val="bg1"/>
-                </a:solidFill>
-              </a:rPr>
-              <a:t>La seguridad física, la autonomía y la estabilidad laboral del personal operativo.</a:t>
-            </a:r>
-            <a:endParaRPr lang="en-US" sz="1400" dirty="0"/>
-          </a:p>
-        </p:txBody>
-      </p:sp>
-      <p:sp>
-        <p:nvSpPr>
-          <p:cNvPr id="10" name="Text 7"/>
-          <p:cNvSpPr txBox="1"/>
-          <p:nvPr/>
-        </p:nvSpPr>
-        <p:spPr>
-          <a:xfrm>
-            <a:off x="457200" y="3977640"/>
-            <a:ext cx="8229600" cy="457200"/>
-          </a:xfrm>
-          <a:prstGeom prst="rect">
-            <a:avLst/>
-          </a:prstGeom>
-          <a:noFill/>
-          <a:ln/>
-        </p:spPr>
-        <p:txBody>
-          <a:bodyPr wrap="square" lIns="0" tIns="0" rIns="0" bIns="0" rtlCol="0" anchor="t"/>
-          <a:lstStyle/>
-          <a:p>
-            <a:pPr algn="ctr" indent="0" marL="0">
-              <a:buNone/>
-            </a:pPr>
-            <a:r>
-              <a:rPr lang="en-US" sz="1700" i="1" dirty="0">
-                <a:solidFill>
-                  <a:schemeClr val="accent1"/>
-                </a:solidFill>
-              </a:rPr>
-              <a:t>…si la optimización algorítmica se antepone a la ética y al bienestar humano.</a:t>
-            </a:r>
-            <a:endParaRPr lang="en-US" sz="1700" dirty="0"/>
-          </a:p>
-        </p:txBody>
-      </p:sp>
-      <p:sp>
-        <p:nvSpPr>
-          <p:cNvPr id="25" name="Slide Number Placeholder 0"/>
-          <p:cNvSpPr>
-            <a:spLocks noGrp="1"/>
-          </p:cNvSpPr>
-          <p:nvPr>
-            <p:ph type="sldNum" sz="quarter" idx="4294967295"/>
-          </p:nvPr>
-        </p:nvSpPr>
-        <p:spPr>
-          <a:xfrm>
-            <a:off x="8412480" y="4754880"/>
-            <a:ext cx="457200" cy="274320"/>
-          </a:xfrm>
-          <a:prstGeom prst="rect">
-            <a:avLst/>
-          </a:prstGeom>
-          <a:extLst>
-            <a:ext uri="{C572A759-6A51-4108-AA02-DFA0A04FC94B}">
-              <ma14:wrappingTextBoxFlag xmlns:ma14="http://schemas.microsoft.com/office/mac/drawingml/2011/main" val="0"/>
-            </a:ext>
-          </a:extLst>
-        </p:spPr>
-        <p:txBody>
-          <a:bodyPr/>
-          <a:lstStyle>
-            <a:lvl1pPr>
-              <a:defRPr sz="1000">
-                <a:solidFill>
-                  <a:schemeClr val="accent6"/>
-                </a:solidFill>
-              </a:defRPr>
-            </a:lvl1pPr>
-          </a:lstStyle>
-          <a:p>
-            <a:pPr algn="l"/>
-            <a:fld id="{F7021451-1387-4CA6-816F-3879F97B5CBC}" type="slidenum">
-              <a:rPr b="0" lang="en-US"/>
-              <a:t>10</a:t>
-            </a:fld>
-            <a:endParaRPr lang="en-US"/>
-          </a:p>
-        </p:txBody>
-      </p:sp>
-    </p:spTree>
-  </p:cSld>
-  <p:clrMapOvr>
-    <a:masterClrMapping/>
-  </p:clrMapOvr>
-</p:sld>
-</file>
-
-<file path=ppt/slides/slide11.xml><?xml version="1.0" encoding="utf-8"?>
-<p:sld xmlns:a="http://schemas.openxmlformats.org/drawingml/2006/main" xmlns:r="http://schemas.openxmlformats.org/officeDocument/2006/relationships" xmlns:p="http://schemas.openxmlformats.org/presentationml/2006/main">
-  <p:cSld name="Slide 11">
-    <p:spTree>
-      <p:nvGrpSpPr>
-        <p:cNvPr id="1" name=""/>
-        <p:cNvGrpSpPr/>
-        <p:nvPr/>
-      </p:nvGrpSpPr>
-      <p:grpSpPr>
-        <a:xfrm>
-          <a:off x="0" y="0"/>
-          <a:ext cx="0" cy="0"/>
-          <a:chOff x="0" y="0"/>
-          <a:chExt cx="0" cy="0"/>
-        </a:xfrm>
-      </p:grpSpPr>
-      <p:sp>
-        <p:nvSpPr>
-          <p:cNvPr id="2" name="Text 0"/>
-          <p:cNvSpPr/>
-          <p:nvPr>
-            <p:ph idx="100" type="title" hasCustomPrompt="1"/>
-          </p:nvPr>
-        </p:nvSpPr>
-        <p:spPr>
-          <a:xfrm>
-            <a:off x="457200" y="274320"/>
-            <a:ext cx="8229600" cy="685800"/>
-          </a:xfrm>
-          <a:prstGeom prst="rect">
-            <a:avLst/>
-          </a:prstGeom>
-          <a:noFill/>
-          <a:ln/>
-        </p:spPr>
-        <p:txBody>
-          <a:bodyPr wrap="square" lIns="0" tIns="0" rIns="0" bIns="0" rtlCol="0" anchor="ctr"/>
-          <a:lstStyle/>
-          <a:p>
-            <a:pPr algn="l" indent="0" marL="0">
-              <a:buNone/>
-            </a:pPr>
-            <a:r>
-              <a:rPr lang="en-US" sz="2800" b="1" dirty="0">
-                <a:solidFill>
-                  <a:schemeClr val="tx2"/>
-                </a:solidFill>
-              </a:rPr>
-              <a:t>Referencias</a:t>
-            </a:r>
-            <a:endParaRPr lang="en-US" sz="2800" dirty="0"/>
-          </a:p>
-        </p:txBody>
-      </p:sp>
-      <p:sp>
-        <p:nvSpPr>
-          <p:cNvPr id="3" name="Text 1"/>
-          <p:cNvSpPr txBox="1"/>
-          <p:nvPr/>
-        </p:nvSpPr>
-        <p:spPr>
-          <a:xfrm>
-            <a:off x="457200" y="1097280"/>
-            <a:ext cx="8229600" cy="3566160"/>
-          </a:xfrm>
-          <a:prstGeom prst="rect">
-            <a:avLst/>
-          </a:prstGeom>
-          <a:noFill/>
-          <a:ln/>
-        </p:spPr>
-        <p:txBody>
-          <a:bodyPr wrap="square" lIns="0" tIns="0" rIns="0" bIns="0" rtlCol="0" anchor="t"/>
-          <a:lstStyle/>
-          <a:p>
-            <a:pPr indent="0" marL="0">
-              <a:spcAft>
-                <a:spcPts val="600"/>
-              </a:spcAft>
-              <a:buNone/>
-            </a:pPr>
-            <a:r>
-              <a:rPr lang="en-US" sz="1100" dirty="0">
-                <a:solidFill>
-                  <a:schemeClr val="tx1"/>
-                </a:solidFill>
-              </a:rPr>
-              <a:t>Cano, R. J. (2018, 20 marzo). Primer atropello mortal de un coche sin conductor. El País.</a:t>
-            </a:r>
-            <a:endParaRPr lang="en-US" sz="1100" dirty="0"/>
-          </a:p>
-          <a:p>
-            <a:pPr indent="0" marL="0">
-              <a:spcAft>
-                <a:spcPts val="600"/>
-              </a:spcAft>
-              <a:buNone/>
-            </a:pPr>
-            <a:r>
-              <a:rPr lang="en-US" sz="1100" dirty="0">
-                <a:solidFill>
-                  <a:schemeClr val="tx1"/>
-                </a:solidFill>
-              </a:rPr>
-              <a:t>Desnos, A. (2026, 9 octubre). WMS y TMS: una combinación ganadora para la cadena de suministro. Shiptify.</a:t>
-            </a:r>
-            <a:endParaRPr lang="en-US" sz="1100" dirty="0"/>
-          </a:p>
-          <a:p>
-            <a:pPr indent="0" marL="0">
-              <a:spcAft>
-                <a:spcPts val="600"/>
-              </a:spcAft>
-              <a:buNone/>
-            </a:pPr>
-            <a:r>
-              <a:rPr lang="en-US" sz="1100" dirty="0">
-                <a:solidFill>
-                  <a:schemeClr val="tx1"/>
-                </a:solidFill>
-              </a:rPr>
-              <a:t>Gjuarez. (2026, 14 septiembre). Transporte y Logística: una carrera con futuro, innovación y propósito. UCJC Madrid.</a:t>
-            </a:r>
-            <a:endParaRPr lang="en-US" sz="1100" dirty="0"/>
-          </a:p>
-          <a:p>
-            <a:pPr indent="0" marL="0">
-              <a:spcAft>
-                <a:spcPts val="600"/>
-              </a:spcAft>
-              <a:buNone/>
-            </a:pPr>
-            <a:r>
-              <a:rPr lang="en-US" sz="1100" dirty="0">
-                <a:solidFill>
-                  <a:schemeClr val="tx1"/>
-                </a:solidFill>
-              </a:rPr>
-              <a:t>InfoJobs. (s. f.). Ofertas de trabajo: almacenes automatizados.</a:t>
-            </a:r>
-            <a:endParaRPr lang="en-US" sz="1100" dirty="0"/>
-          </a:p>
-          <a:p>
-            <a:pPr indent="0" marL="0">
-              <a:spcAft>
-                <a:spcPts val="600"/>
-              </a:spcAft>
-              <a:buNone/>
-            </a:pPr>
-            <a:r>
-              <a:rPr lang="en-US" sz="1100" dirty="0">
-                <a:solidFill>
-                  <a:schemeClr val="tx1"/>
-                </a:solidFill>
-              </a:rPr>
-              <a:t>Jamali, L. (2025, 2 agosto). Condenan a Tesla a pagar más de US$200 millones por una falla del piloto automático. BBC News Mundo.</a:t>
-            </a:r>
-            <a:endParaRPr lang="en-US" sz="1100" dirty="0"/>
-          </a:p>
-          <a:p>
-            <a:pPr indent="0" marL="0">
-              <a:spcAft>
-                <a:spcPts val="600"/>
-              </a:spcAft>
-              <a:buNone/>
-            </a:pPr>
-            <a:r>
-              <a:rPr lang="en-US" sz="1100" dirty="0">
-                <a:solidFill>
-                  <a:schemeClr val="tx1"/>
-                </a:solidFill>
-              </a:rPr>
-              <a:t>Marcari, D. (2026, 3 marzo). Who is Responsible for an Accident With a Self-driving Car? Marcari Russotto Spencer &amp; Balaban.</a:t>
-            </a:r>
-            <a:endParaRPr lang="en-US" sz="1100" dirty="0"/>
-          </a:p>
-          <a:p>
-            <a:pPr indent="0" marL="0">
-              <a:spcAft>
-                <a:spcPts val="600"/>
-              </a:spcAft>
-              <a:buNone/>
-            </a:pPr>
-            <a:r>
-              <a:rPr lang="en-US" sz="1100" dirty="0">
-                <a:solidFill>
-                  <a:schemeClr val="tx1"/>
-                </a:solidFill>
-              </a:rPr>
-              <a:t>Computrabajo México. (s. f.). Trabajo de automatización y control en Guadalajara, Jalisco.</a:t>
-            </a:r>
-            <a:endParaRPr lang="en-US" sz="1100" dirty="0"/>
-          </a:p>
-          <a:p>
-            <a:pPr indent="0" marL="0">
-              <a:spcAft>
-                <a:spcPts val="600"/>
-              </a:spcAft>
-              <a:buNone/>
-            </a:pPr>
-            <a:r>
-              <a:rPr lang="en-US" sz="1100" dirty="0">
-                <a:solidFill>
-                  <a:schemeClr val="tx1"/>
-                </a:solidFill>
-              </a:rPr>
-              <a:t>William Mattar Accident Lawyers. (2026, 21 septiembre). Responsabilidad en un accidente con un coche autónomo.</a:t>
-            </a:r>
-            <a:endParaRPr lang="en-US" sz="1100" dirty="0"/>
-          </a:p>
-        </p:txBody>
-      </p:sp>
-      <p:sp>
-        <p:nvSpPr>
-          <p:cNvPr id="25" name="Slide Number Placeholder 0"/>
-          <p:cNvSpPr>
-            <a:spLocks noGrp="1"/>
-          </p:cNvSpPr>
-          <p:nvPr>
-            <p:ph type="sldNum" sz="quarter" idx="4294967295"/>
-          </p:nvPr>
-        </p:nvSpPr>
-        <p:spPr>
-          <a:xfrm>
-            <a:off x="8412480" y="4754880"/>
-            <a:ext cx="457200" cy="274320"/>
-          </a:xfrm>
-          <a:prstGeom prst="rect">
-            <a:avLst/>
-          </a:prstGeom>
-          <a:extLst>
-            <a:ext uri="{C572A759-6A51-4108-AA02-DFA0A04FC94B}">
-              <ma14:wrappingTextBoxFlag xmlns:ma14="http://schemas.microsoft.com/office/mac/drawingml/2011/main" val="0"/>
-            </a:ext>
-          </a:extLst>
-        </p:spPr>
-        <p:txBody>
-          <a:bodyPr/>
-          <a:lstStyle>
-            <a:lvl1pPr>
-              <a:defRPr sz="1000">
-                <a:solidFill>
-                  <a:schemeClr val="accent5"/>
-                </a:solidFill>
-              </a:defRPr>
-            </a:lvl1pPr>
-          </a:lstStyle>
-          <a:p>
-            <a:pPr algn="l"/>
-            <a:fld id="{F7021451-1387-4CA6-816F-3879F97B5CBC}" type="slidenum">
-              <a:rPr b="0" lang="en-US"/>
-              <a:t>11</a:t>
-            </a:fld>
-            <a:endParaRPr lang="en-US"/>
-          </a:p>
-        </p:txBody>
-      </p:sp>
-    </p:spTree>
-  </p:cSld>
-  <p:clrMapOvr>
-    <a:masterClrMapping/>
-  </p:clrMapOvr>
-</p:sld>
-</file>
-
 <file path=ppt/slides/slide2.xml><?xml version="1.0" encoding="utf-8"?>
 <p:sld xmlns:a="http://schemas.openxmlformats.org/drawingml/2006/main" xmlns:r="http://schemas.openxmlformats.org/officeDocument/2006/relationships" xmlns:p="http://schemas.openxmlformats.org/presentationml/2006/main">
   <p:cSld name="Slide 2">
@@ -3662,7 +2770,7 @@
                   <a:schemeClr val="tx2"/>
                 </a:solidFill>
               </a:rPr>
-              <a:t>¿Qué empleos sobreviven a la automatización?</a:t>
+              <a:t>Preguntas detonadoras</a:t>
             </a:r>
             <a:endParaRPr lang="en-US" sz="2800" dirty="0"/>
           </a:p>
@@ -3676,12 +2784,12 @@
         </p:nvSpPr>
         <p:spPr>
           <a:xfrm>
-            <a:off x="457200" y="1143000"/>
-            <a:ext cx="4023360" cy="1600200"/>
+            <a:off x="457200" y="1051560"/>
+            <a:ext cx="4023360" cy="3520440"/>
           </a:xfrm>
           <a:prstGeom prst="roundRect">
             <a:avLst>
-              <a:gd name="adj" fmla="val 6857"/>
+              <a:gd name="adj" fmla="val 3117"/>
             </a:avLst>
           </a:prstGeom>
           <a:solidFill>
@@ -3692,14 +2800,50 @@
       </p:sp>
       <p:sp>
         <p:nvSpPr>
-          <p:cNvPr id="4" name="Shape 2"/>
+          <p:cNvPr id="4" name="Text 2"/>
+          <p:cNvSpPr txBox="1"/>
+          <p:nvPr/>
+        </p:nvSpPr>
+        <p:spPr>
+          <a:xfrm>
+            <a:off x="640080" y="1170432"/>
+            <a:ext cx="3657600" cy="548640"/>
+          </a:xfrm>
+          <a:prstGeom prst="rect">
+            <a:avLst/>
+          </a:prstGeom>
+          <a:noFill/>
+          <a:ln/>
+        </p:spPr>
+        <p:txBody>
+          <a:bodyPr wrap="square" lIns="0" tIns="0" rIns="0" bIns="0" rtlCol="0" anchor="t"/>
+          <a:lstStyle/>
+          <a:p>
+            <a:pPr indent="0" marL="0">
+              <a:buNone/>
+            </a:pPr>
+            <a:r>
+              <a:rPr lang="en-US" sz="1400" b="1" dirty="0">
+                <a:solidFill>
+                  <a:schemeClr val="tx2"/>
+                </a:solidFill>
+              </a:rPr>
+              <a:t>1. Con vehículos autónomos y almacenes robotizados, ¿qué empleo sobrevive?</a:t>
+            </a:r>
+            <a:endParaRPr lang="en-US" sz="1400" dirty="0"/>
+          </a:p>
+        </p:txBody>
+      </p:sp>
+      <p:sp>
+        <p:nvSpPr>
+          <p:cNvPr id="5" name="Shape 3"/>
           <p:cNvSpPr/>
           <p:nvPr/>
         </p:nvSpPr>
         <p:spPr>
           <a:xfrm>
-            <a:off x="685800" y="1417320"/>
-            <a:ext cx="685800" cy="685800"/>
+            <a:off x="640080" y="1847088"/>
+            <a:ext cx="457200" cy="457200"/>
           </a:xfrm>
           <a:prstGeom prst="ellipse">
             <a:avLst/>
@@ -3712,7 +2856,7 @@
       </p:sp>
       <p:pic>
         <p:nvPicPr>
-          <p:cNvPr id="5" name="Image 0" descr="preencoded.png">    </p:cNvPr>
+          <p:cNvPr id="6" name="Image 0" descr="preencoded.png">    </p:cNvPr>
           <p:cNvPicPr>
             <a:picLocks noChangeAspect="1"/>
           </p:cNvPicPr>
@@ -3726,50 +2870,14 @@
         </p:blipFill>
         <p:spPr>
           <a:xfrm>
-            <a:off x="857250" y="1588770"/>
-            <a:ext cx="342900" cy="342900"/>
+            <a:off x="754380" y="1961388"/>
+            <a:ext cx="228600" cy="228600"/>
           </a:xfrm>
           <a:prstGeom prst="rect">
             <a:avLst/>
           </a:prstGeom>
         </p:spPr>
       </p:pic>
-      <p:sp>
-        <p:nvSpPr>
-          <p:cNvPr id="6" name="Text 3"/>
-          <p:cNvSpPr txBox="1"/>
-          <p:nvPr/>
-        </p:nvSpPr>
-        <p:spPr>
-          <a:xfrm>
-            <a:off x="1554480" y="1371600"/>
-            <a:ext cx="2743200" cy="320040"/>
-          </a:xfrm>
-          <a:prstGeom prst="rect">
-            <a:avLst/>
-          </a:prstGeom>
-          <a:noFill/>
-          <a:ln/>
-        </p:spPr>
-        <p:txBody>
-          <a:bodyPr wrap="square" lIns="0" tIns="0" rIns="0" bIns="0" rtlCol="0" anchor="t"/>
-          <a:lstStyle/>
-          <a:p>
-            <a:pPr indent="0" marL="0">
-              <a:buNone/>
-            </a:pPr>
-            <a:r>
-              <a:rPr lang="en-US" sz="1500" b="1" dirty="0">
-                <a:solidFill>
-                  <a:schemeClr val="tx2"/>
-                </a:solidFill>
-              </a:rPr>
-              <a:t>Mantenimiento y seguridad</a:t>
-            </a:r>
-            <a:endParaRPr lang="en-US" sz="1500" dirty="0"/>
-          </a:p>
-        </p:txBody>
-      </p:sp>
       <p:sp>
         <p:nvSpPr>
           <p:cNvPr id="7" name="Text 4"/>
@@ -3778,8 +2886,8 @@
         </p:nvSpPr>
         <p:spPr>
           <a:xfrm>
-            <a:off x="1554480" y="1709928"/>
-            <a:ext cx="2788920" cy="960120"/>
+            <a:off x="1234440" y="1828800"/>
+            <a:ext cx="3108960" cy="621792"/>
           </a:xfrm>
           <a:prstGeom prst="rect">
             <a:avLst/>
@@ -3795,14 +2903,25 @@
               <a:buNone/>
             </a:pPr>
             <a:r>
-              <a:rPr lang="en-US" sz="1300" dirty="0">
+              <a:rPr lang="en-US" sz="1200" b="1" dirty="0">
+                <a:solidFill>
+                  <a:schemeClr val="tx2"/>
+                </a:solidFill>
+              </a:rPr>
+              <a:t>Mantenimiento y seguridad: </a:t>
+            </a:r>
+            <a:pPr indent="0" marL="0">
+              <a:buNone/>
+            </a:pPr>
+            <a:r>
+              <a:rPr lang="en-US" sz="1200" dirty="0">
                 <a:solidFill>
                   <a:schemeClr val="tx1"/>
                 </a:solidFill>
               </a:rPr>
-              <a:t>Técnicos en prevención de riesgos (interacción hombre-máquina) y electromecánicos para almacenes automatizados.</a:t>
-            </a:r>
-            <a:endParaRPr lang="en-US" sz="1300" dirty="0"/>
+              <a:t>electromecánicos y técnicos en prevención de riesgos.</a:t>
+            </a:r>
+            <a:endParaRPr lang="en-US" sz="1200" dirty="0"/>
           </a:p>
         </p:txBody>
       </p:sp>
@@ -3814,43 +2933,21 @@
         </p:nvSpPr>
         <p:spPr>
           <a:xfrm>
-            <a:off x="4663440" y="1143000"/>
-            <a:ext cx="4023360" cy="1600200"/>
-          </a:xfrm>
-          <a:prstGeom prst="roundRect">
-            <a:avLst>
-              <a:gd name="adj" fmla="val 6857"/>
-            </a:avLst>
+            <a:off x="640080" y="2523744"/>
+            <a:ext cx="457200" cy="457200"/>
+          </a:xfrm>
+          <a:prstGeom prst="ellipse">
+            <a:avLst/>
           </a:prstGeom>
           <a:solidFill>
-            <a:schemeClr val="bg2"/>
-          </a:solidFill>
-          <a:ln/>
-        </p:spPr>
-      </p:sp>
-      <p:sp>
-        <p:nvSpPr>
-          <p:cNvPr id="9" name="Shape 6"/>
-          <p:cNvSpPr/>
-          <p:nvPr/>
-        </p:nvSpPr>
-        <p:spPr>
-          <a:xfrm>
-            <a:off x="4892040" y="1417320"/>
-            <a:ext cx="685800" cy="685800"/>
-          </a:xfrm>
-          <a:prstGeom prst="ellipse">
-            <a:avLst/>
-          </a:prstGeom>
-          <a:solidFill>
-            <a:schemeClr val="accent2"/>
+            <a:schemeClr val="tx2"/>
           </a:solidFill>
           <a:ln/>
         </p:spPr>
       </p:sp>
       <p:pic>
         <p:nvPicPr>
-          <p:cNvPr id="10" name="Image 1" descr="preencoded.png">    </p:cNvPr>
+          <p:cNvPr id="9" name="Image 1" descr="preencoded.png">    </p:cNvPr>
           <p:cNvPicPr>
             <a:picLocks noChangeAspect="1"/>
           </p:cNvPicPr>
@@ -3864,8 +2961,8 @@
         </p:blipFill>
         <p:spPr>
           <a:xfrm>
-            <a:off x="5063490" y="1588770"/>
-            <a:ext cx="342900" cy="342900"/>
+            <a:off x="754380" y="2638044"/>
+            <a:ext cx="228600" cy="228600"/>
           </a:xfrm>
           <a:prstGeom prst="rect">
             <a:avLst/>
@@ -3874,14 +2971,14 @@
       </p:pic>
       <p:sp>
         <p:nvSpPr>
-          <p:cNvPr id="11" name="Text 7"/>
+          <p:cNvPr id="10" name="Text 6"/>
           <p:cNvSpPr txBox="1"/>
           <p:nvPr/>
         </p:nvSpPr>
         <p:spPr>
           <a:xfrm>
-            <a:off x="5760720" y="1371600"/>
-            <a:ext cx="2743200" cy="320040"/>
+            <a:off x="1234440" y="2505456"/>
+            <a:ext cx="3108960" cy="621792"/>
           </a:xfrm>
           <a:prstGeom prst="rect">
             <a:avLst/>
@@ -3897,85 +2994,38 @@
               <a:buNone/>
             </a:pPr>
             <a:r>
-              <a:rPr lang="en-US" sz="1500" b="1" dirty="0">
+              <a:rPr lang="en-US" sz="1200" b="1" dirty="0">
                 <a:solidFill>
                   <a:schemeClr val="tx2"/>
                 </a:solidFill>
               </a:rPr>
-              <a:t>Automatización y robótica</a:t>
-            </a:r>
-            <a:endParaRPr lang="en-US" sz="1500" dirty="0"/>
-          </a:p>
-        </p:txBody>
-      </p:sp>
-      <p:sp>
-        <p:nvSpPr>
-          <p:cNvPr id="12" name="Text 8"/>
-          <p:cNvSpPr txBox="1"/>
-          <p:nvPr/>
-        </p:nvSpPr>
-        <p:spPr>
-          <a:xfrm>
-            <a:off x="5760720" y="1709928"/>
-            <a:ext cx="2788920" cy="960120"/>
-          </a:xfrm>
-          <a:prstGeom prst="rect">
-            <a:avLst/>
-          </a:prstGeom>
-          <a:noFill/>
-          <a:ln/>
-        </p:spPr>
-        <p:txBody>
-          <a:bodyPr wrap="square" lIns="0" tIns="0" rIns="0" bIns="0" rtlCol="0" anchor="t"/>
-          <a:lstStyle/>
-          <a:p>
+              <a:t>Automatización y robótica: </a:t>
+            </a:r>
             <a:pPr indent="0" marL="0">
               <a:buNone/>
             </a:pPr>
             <a:r>
-              <a:rPr lang="en-US" sz="1300" dirty="0">
+              <a:rPr lang="en-US" sz="1200" dirty="0">
                 <a:solidFill>
                   <a:schemeClr val="tx1"/>
                 </a:solidFill>
               </a:rPr>
-              <a:t>Ingenieros en control, sensores e instrumentación; diseño, navegación y calibración de máquinas autónomas.</a:t>
-            </a:r>
-            <a:endParaRPr lang="en-US" sz="1300" dirty="0"/>
-          </a:p>
-        </p:txBody>
-      </p:sp>
-      <p:sp>
-        <p:nvSpPr>
-          <p:cNvPr id="13" name="Shape 9"/>
+              <a:t>ingenieros en control, sensores y programación.</a:t>
+            </a:r>
+            <a:endParaRPr lang="en-US" sz="1200" dirty="0"/>
+          </a:p>
+        </p:txBody>
+      </p:sp>
+      <p:sp>
+        <p:nvSpPr>
+          <p:cNvPr id="11" name="Shape 7"/>
           <p:cNvSpPr/>
           <p:nvPr/>
         </p:nvSpPr>
         <p:spPr>
           <a:xfrm>
-            <a:off x="457200" y="2926080"/>
-            <a:ext cx="4023360" cy="1600200"/>
-          </a:xfrm>
-          <a:prstGeom prst="roundRect">
-            <a:avLst>
-              <a:gd name="adj" fmla="val 6857"/>
-            </a:avLst>
-          </a:prstGeom>
-          <a:solidFill>
-            <a:schemeClr val="bg2"/>
-          </a:solidFill>
-          <a:ln/>
-        </p:spPr>
-      </p:sp>
-      <p:sp>
-        <p:nvSpPr>
-          <p:cNvPr id="14" name="Shape 10"/>
-          <p:cNvSpPr/>
-          <p:nvPr/>
-        </p:nvSpPr>
-        <p:spPr>
-          <a:xfrm>
-            <a:off x="685800" y="3200400"/>
-            <a:ext cx="685800" cy="685800"/>
+            <a:off x="640080" y="3200400"/>
+            <a:ext cx="457200" cy="457200"/>
           </a:xfrm>
           <a:prstGeom prst="ellipse">
             <a:avLst/>
@@ -3988,7 +3038,7 @@
       </p:sp>
       <p:pic>
         <p:nvPicPr>
-          <p:cNvPr id="15" name="Image 2" descr="preencoded.png">    </p:cNvPr>
+          <p:cNvPr id="12" name="Image 2" descr="preencoded.png">    </p:cNvPr>
           <p:cNvPicPr>
             <a:picLocks noChangeAspect="1"/>
           </p:cNvPicPr>
@@ -4002,8 +3052,8 @@
         </p:blipFill>
         <p:spPr>
           <a:xfrm>
-            <a:off x="857250" y="3371850"/>
-            <a:ext cx="342900" cy="342900"/>
+            <a:off x="754380" y="3314700"/>
+            <a:ext cx="228600" cy="228600"/>
           </a:xfrm>
           <a:prstGeom prst="rect">
             <a:avLst/>
@@ -4012,14 +3062,14 @@
       </p:pic>
       <p:sp>
         <p:nvSpPr>
-          <p:cNvPr id="16" name="Text 11"/>
+          <p:cNvPr id="13" name="Text 8"/>
           <p:cNvSpPr txBox="1"/>
           <p:nvPr/>
         </p:nvSpPr>
         <p:spPr>
           <a:xfrm>
-            <a:off x="1554480" y="3154680"/>
-            <a:ext cx="2743200" cy="320040"/>
+            <a:off x="1234440" y="3182112"/>
+            <a:ext cx="3108960" cy="621792"/>
           </a:xfrm>
           <a:prstGeom prst="rect">
             <a:avLst/>
@@ -4035,98 +3085,51 @@
               <a:buNone/>
             </a:pPr>
             <a:r>
-              <a:rPr lang="en-US" sz="1500" b="1" dirty="0">
+              <a:rPr lang="en-US" sz="1200" b="1" dirty="0">
                 <a:solidFill>
                   <a:schemeClr val="tx2"/>
                 </a:solidFill>
               </a:rPr>
-              <a:t>Software y datos</a:t>
-            </a:r>
-            <a:endParaRPr lang="en-US" sz="1500" dirty="0"/>
-          </a:p>
-        </p:txBody>
-      </p:sp>
-      <p:sp>
-        <p:nvSpPr>
-          <p:cNvPr id="17" name="Text 12"/>
-          <p:cNvSpPr txBox="1"/>
-          <p:nvPr/>
-        </p:nvSpPr>
-        <p:spPr>
-          <a:xfrm>
-            <a:off x="1554480" y="3493008"/>
-            <a:ext cx="2788920" cy="960120"/>
-          </a:xfrm>
-          <a:prstGeom prst="rect">
-            <a:avLst/>
-          </a:prstGeom>
-          <a:noFill/>
-          <a:ln/>
-        </p:spPr>
-        <p:txBody>
-          <a:bodyPr wrap="square" lIns="0" tIns="0" rIns="0" bIns="0" rtlCol="0" anchor="t"/>
-          <a:lstStyle/>
-          <a:p>
+              <a:t>Software y datos: </a:t>
+            </a:r>
             <a:pPr indent="0" marL="0">
               <a:buNone/>
             </a:pPr>
             <a:r>
-              <a:rPr lang="en-US" sz="1300" dirty="0">
+              <a:rPr lang="en-US" sz="1200" dirty="0">
                 <a:solidFill>
                   <a:schemeClr val="tx1"/>
                 </a:solidFill>
               </a:rPr>
-              <a:t>Mantener el software desplegado y sin fallos, conectando la nube con los servidores Edge que controlan la maquinaria.</a:t>
-            </a:r>
-            <a:endParaRPr lang="en-US" sz="1300" dirty="0"/>
-          </a:p>
-        </p:txBody>
-      </p:sp>
-      <p:sp>
-        <p:nvSpPr>
-          <p:cNvPr id="18" name="Shape 13"/>
+              <a:t>mantener sistemas en la nube y Edge sin fallos.</a:t>
+            </a:r>
+            <a:endParaRPr lang="en-US" sz="1200" dirty="0"/>
+          </a:p>
+        </p:txBody>
+      </p:sp>
+      <p:sp>
+        <p:nvSpPr>
+          <p:cNvPr id="14" name="Shape 9"/>
           <p:cNvSpPr/>
           <p:nvPr/>
         </p:nvSpPr>
         <p:spPr>
           <a:xfrm>
-            <a:off x="4663440" y="2926080"/>
-            <a:ext cx="4023360" cy="1600200"/>
-          </a:xfrm>
-          <a:prstGeom prst="roundRect">
-            <a:avLst>
-              <a:gd name="adj" fmla="val 6857"/>
-            </a:avLst>
+            <a:off x="640080" y="3877056"/>
+            <a:ext cx="457200" cy="457200"/>
+          </a:xfrm>
+          <a:prstGeom prst="ellipse">
+            <a:avLst/>
           </a:prstGeom>
           <a:solidFill>
-            <a:schemeClr val="bg2"/>
-          </a:solidFill>
-          <a:ln/>
-        </p:spPr>
-      </p:sp>
-      <p:sp>
-        <p:nvSpPr>
-          <p:cNvPr id="19" name="Shape 14"/>
-          <p:cNvSpPr/>
-          <p:nvPr/>
-        </p:nvSpPr>
-        <p:spPr>
-          <a:xfrm>
-            <a:off x="4892040" y="3200400"/>
-            <a:ext cx="685800" cy="685800"/>
-          </a:xfrm>
-          <a:prstGeom prst="ellipse">
-            <a:avLst/>
-          </a:prstGeom>
-          <a:solidFill>
-            <a:schemeClr val="accent2"/>
+            <a:schemeClr val="tx2"/>
           </a:solidFill>
           <a:ln/>
         </p:spPr>
       </p:sp>
       <p:pic>
         <p:nvPicPr>
-          <p:cNvPr id="20" name="Image 3" descr="preencoded.png">    </p:cNvPr>
+          <p:cNvPr id="15" name="Image 3" descr="preencoded.png">    </p:cNvPr>
           <p:cNvPicPr>
             <a:picLocks noChangeAspect="1"/>
           </p:cNvPicPr>
@@ -4140,8 +3143,8 @@
         </p:blipFill>
         <p:spPr>
           <a:xfrm>
-            <a:off x="5063490" y="3371850"/>
-            <a:ext cx="342900" cy="342900"/>
+            <a:off x="754380" y="3991356"/>
+            <a:ext cx="228600" cy="228600"/>
           </a:xfrm>
           <a:prstGeom prst="rect">
             <a:avLst/>
@@ -4150,14 +3153,14 @@
       </p:pic>
       <p:sp>
         <p:nvSpPr>
-          <p:cNvPr id="21" name="Text 15"/>
+          <p:cNvPr id="16" name="Text 10"/>
           <p:cNvSpPr txBox="1"/>
           <p:nvPr/>
         </p:nvSpPr>
         <p:spPr>
           <a:xfrm>
-            <a:off x="5760720" y="3154680"/>
-            <a:ext cx="2743200" cy="320040"/>
+            <a:off x="1234440" y="3858768"/>
+            <a:ext cx="3108960" cy="621792"/>
           </a:xfrm>
           <a:prstGeom prst="rect">
             <a:avLst/>
@@ -4173,27 +3176,60 @@
               <a:buNone/>
             </a:pPr>
             <a:r>
-              <a:rPr lang="en-US" sz="1500" b="1" dirty="0">
+              <a:rPr lang="en-US" sz="1200" b="1" dirty="0">
                 <a:solidFill>
                   <a:schemeClr val="tx2"/>
                 </a:solidFill>
               </a:rPr>
-              <a:t>Gestión y administración</a:t>
-            </a:r>
-            <a:endParaRPr lang="en-US" sz="1500" dirty="0"/>
-          </a:p>
-        </p:txBody>
-      </p:sp>
-      <p:sp>
-        <p:nvSpPr>
-          <p:cNvPr id="22" name="Text 16"/>
+              <a:t>Gestión: </a:t>
+            </a:r>
+            <a:pPr indent="0" marL="0">
+              <a:buNone/>
+            </a:pPr>
+            <a:r>
+              <a:rPr lang="en-US" sz="1200" dirty="0">
+                <a:solidFill>
+                  <a:schemeClr val="tx1"/>
+                </a:solidFill>
+              </a:rPr>
+              <a:t>supervisión, estrategia, calidad, contabilidad, nóminas y RR. HH.</a:t>
+            </a:r>
+            <a:endParaRPr lang="en-US" sz="1200" dirty="0"/>
+          </a:p>
+        </p:txBody>
+      </p:sp>
+      <p:sp>
+        <p:nvSpPr>
+          <p:cNvPr id="17" name="Shape 11"/>
+          <p:cNvSpPr/>
+          <p:nvPr/>
+        </p:nvSpPr>
+        <p:spPr>
+          <a:xfrm>
+            <a:off x="4663440" y="1051560"/>
+            <a:ext cx="4023360" cy="3520440"/>
+          </a:xfrm>
+          <a:prstGeom prst="roundRect">
+            <a:avLst>
+              <a:gd name="adj" fmla="val 3117"/>
+            </a:avLst>
+          </a:prstGeom>
+          <a:solidFill>
+            <a:schemeClr val="bg2"/>
+          </a:solidFill>
+          <a:ln/>
+        </p:spPr>
+      </p:sp>
+      <p:sp>
+        <p:nvSpPr>
+          <p:cNvPr id="18" name="Text 12"/>
           <p:cNvSpPr txBox="1"/>
           <p:nvPr/>
         </p:nvSpPr>
         <p:spPr>
           <a:xfrm>
-            <a:off x="5760720" y="3493008"/>
-            <a:ext cx="2788920" cy="960120"/>
+            <a:off x="4846320" y="1170432"/>
+            <a:ext cx="3657600" cy="548640"/>
           </a:xfrm>
           <a:prstGeom prst="rect">
             <a:avLst/>
@@ -4209,27 +3245,391 @@
               <a:buNone/>
             </a:pPr>
             <a:r>
-              <a:rPr lang="en-US" sz="1300" dirty="0">
+              <a:rPr lang="en-US" sz="1400" b="1" dirty="0">
+                <a:solidFill>
+                  <a:schemeClr val="accent2"/>
+                </a:solidFill>
+              </a:rPr>
+              <a:t>2. ¿Quién asume la responsabilidad en un accidente sin conductor?</a:t>
+            </a:r>
+            <a:endParaRPr lang="en-US" sz="1400" dirty="0"/>
+          </a:p>
+        </p:txBody>
+      </p:sp>
+      <p:sp>
+        <p:nvSpPr>
+          <p:cNvPr id="19" name="Shape 13"/>
+          <p:cNvSpPr/>
+          <p:nvPr/>
+        </p:nvSpPr>
+        <p:spPr>
+          <a:xfrm>
+            <a:off x="4846320" y="1847088"/>
+            <a:ext cx="457200" cy="457200"/>
+          </a:xfrm>
+          <a:prstGeom prst="ellipse">
+            <a:avLst/>
+          </a:prstGeom>
+          <a:solidFill>
+            <a:schemeClr val="accent2"/>
+          </a:solidFill>
+          <a:ln/>
+        </p:spPr>
+      </p:sp>
+      <p:pic>
+        <p:nvPicPr>
+          <p:cNvPr id="20" name="Image 4" descr="preencoded.png">    </p:cNvPr>
+          <p:cNvPicPr>
+            <a:picLocks noChangeAspect="1"/>
+          </p:cNvPicPr>
+          <p:nvPr/>
+        </p:nvPicPr>
+        <p:blipFill>
+          <a:blip r:embed="rId5"/>
+          <a:stretch>
+            <a:fillRect/>
+          </a:stretch>
+        </p:blipFill>
+        <p:spPr>
+          <a:xfrm>
+            <a:off x="4960620" y="1961388"/>
+            <a:ext cx="228600" cy="228600"/>
+          </a:xfrm>
+          <a:prstGeom prst="rect">
+            <a:avLst/>
+          </a:prstGeom>
+        </p:spPr>
+      </p:pic>
+      <p:sp>
+        <p:nvSpPr>
+          <p:cNvPr id="21" name="Text 14"/>
+          <p:cNvSpPr txBox="1"/>
+          <p:nvPr/>
+        </p:nvSpPr>
+        <p:spPr>
+          <a:xfrm>
+            <a:off x="5440680" y="1828800"/>
+            <a:ext cx="3108960" cy="621792"/>
+          </a:xfrm>
+          <a:prstGeom prst="rect">
+            <a:avLst/>
+          </a:prstGeom>
+          <a:noFill/>
+          <a:ln/>
+        </p:spPr>
+        <p:txBody>
+          <a:bodyPr wrap="square" lIns="0" tIns="0" rIns="0" bIns="0" rtlCol="0" anchor="t"/>
+          <a:lstStyle/>
+          <a:p>
+            <a:pPr indent="0" marL="0">
+              <a:buNone/>
+            </a:pPr>
+            <a:r>
+              <a:rPr lang="en-US" sz="1200" b="1" dirty="0">
+                <a:solidFill>
+                  <a:schemeClr val="tx2"/>
+                </a:solidFill>
+              </a:rPr>
+              <a:t>Fabricante: </a:t>
+            </a:r>
+            <a:pPr indent="0" marL="0">
+              <a:buNone/>
+            </a:pPr>
+            <a:r>
+              <a:rPr lang="en-US" sz="1200" dirty="0">
                 <a:solidFill>
                   <a:schemeClr val="tx1"/>
                 </a:solidFill>
               </a:rPr>
-              <a:t>Supervisión, estrategia y calidad; además de contabilidad, nóminas y recursos humanos.</a:t>
-            </a:r>
-            <a:endParaRPr lang="en-US" sz="1300" dirty="0"/>
-          </a:p>
-        </p:txBody>
-      </p:sp>
-      <p:sp>
-        <p:nvSpPr>
-          <p:cNvPr id="23" name="Text 17"/>
+              <a:t>responde si el vehículo o su software fallan.</a:t>
+            </a:r>
+            <a:endParaRPr lang="en-US" sz="1200" dirty="0"/>
+          </a:p>
+        </p:txBody>
+      </p:sp>
+      <p:sp>
+        <p:nvSpPr>
+          <p:cNvPr id="22" name="Shape 15"/>
+          <p:cNvSpPr/>
+          <p:nvPr/>
+        </p:nvSpPr>
+        <p:spPr>
+          <a:xfrm>
+            <a:off x="4846320" y="2523744"/>
+            <a:ext cx="457200" cy="457200"/>
+          </a:xfrm>
+          <a:prstGeom prst="ellipse">
+            <a:avLst/>
+          </a:prstGeom>
+          <a:solidFill>
+            <a:schemeClr val="accent2"/>
+          </a:solidFill>
+          <a:ln/>
+        </p:spPr>
+      </p:sp>
+      <p:pic>
+        <p:nvPicPr>
+          <p:cNvPr id="23" name="Image 5" descr="preencoded.png">    </p:cNvPr>
+          <p:cNvPicPr>
+            <a:picLocks noChangeAspect="1"/>
+          </p:cNvPicPr>
+          <p:nvPr/>
+        </p:nvPicPr>
+        <p:blipFill>
+          <a:blip r:embed="rId6"/>
+          <a:stretch>
+            <a:fillRect/>
+          </a:stretch>
+        </p:blipFill>
+        <p:spPr>
+          <a:xfrm>
+            <a:off x="4960620" y="2638044"/>
+            <a:ext cx="228600" cy="228600"/>
+          </a:xfrm>
+          <a:prstGeom prst="rect">
+            <a:avLst/>
+          </a:prstGeom>
+        </p:spPr>
+      </p:pic>
+      <p:sp>
+        <p:nvSpPr>
+          <p:cNvPr id="24" name="Text 16"/>
           <p:cNvSpPr txBox="1"/>
           <p:nvPr/>
         </p:nvSpPr>
         <p:spPr>
           <a:xfrm>
+            <a:off x="5440680" y="2505456"/>
+            <a:ext cx="3108960" cy="621792"/>
+          </a:xfrm>
+          <a:prstGeom prst="rect">
+            <a:avLst/>
+          </a:prstGeom>
+          <a:noFill/>
+          <a:ln/>
+        </p:spPr>
+        <p:txBody>
+          <a:bodyPr wrap="square" lIns="0" tIns="0" rIns="0" bIns="0" rtlCol="0" anchor="t"/>
+          <a:lstStyle/>
+          <a:p>
+            <a:pPr indent="0" marL="0">
+              <a:buNone/>
+            </a:pPr>
+            <a:r>
+              <a:rPr lang="en-US" sz="1200" b="1" dirty="0">
+                <a:solidFill>
+                  <a:schemeClr val="tx2"/>
+                </a:solidFill>
+              </a:rPr>
+              <a:t>Conductor: </a:t>
+            </a:r>
+            <a:pPr indent="0" marL="0">
+              <a:buNone/>
+            </a:pPr>
+            <a:r>
+              <a:rPr lang="en-US" sz="1200" dirty="0">
+                <a:solidFill>
+                  <a:schemeClr val="tx1"/>
+                </a:solidFill>
+              </a:rPr>
+              <a:t>si ignora la alerta de tomar el control.</a:t>
+            </a:r>
+            <a:endParaRPr lang="en-US" sz="1200" dirty="0"/>
+          </a:p>
+        </p:txBody>
+      </p:sp>
+      <p:sp>
+        <p:nvSpPr>
+          <p:cNvPr id="25" name="Shape 17"/>
+          <p:cNvSpPr/>
+          <p:nvPr/>
+        </p:nvSpPr>
+        <p:spPr>
+          <a:xfrm>
+            <a:off x="4846320" y="3200400"/>
+            <a:ext cx="457200" cy="457200"/>
+          </a:xfrm>
+          <a:prstGeom prst="ellipse">
+            <a:avLst/>
+          </a:prstGeom>
+          <a:solidFill>
+            <a:schemeClr val="accent2"/>
+          </a:solidFill>
+          <a:ln/>
+        </p:spPr>
+      </p:sp>
+      <p:pic>
+        <p:nvPicPr>
+          <p:cNvPr id="26" name="Image 6" descr="preencoded.png">    </p:cNvPr>
+          <p:cNvPicPr>
+            <a:picLocks noChangeAspect="1"/>
+          </p:cNvPicPr>
+          <p:nvPr/>
+        </p:nvPicPr>
+        <p:blipFill>
+          <a:blip r:embed="rId7"/>
+          <a:stretch>
+            <a:fillRect/>
+          </a:stretch>
+        </p:blipFill>
+        <p:spPr>
+          <a:xfrm>
+            <a:off x="4960620" y="3314700"/>
+            <a:ext cx="228600" cy="228600"/>
+          </a:xfrm>
+          <a:prstGeom prst="rect">
+            <a:avLst/>
+          </a:prstGeom>
+        </p:spPr>
+      </p:pic>
+      <p:sp>
+        <p:nvSpPr>
+          <p:cNvPr id="27" name="Text 18"/>
+          <p:cNvSpPr txBox="1"/>
+          <p:nvPr/>
+        </p:nvSpPr>
+        <p:spPr>
+          <a:xfrm>
+            <a:off x="5440680" y="3182112"/>
+            <a:ext cx="3108960" cy="621792"/>
+          </a:xfrm>
+          <a:prstGeom prst="rect">
+            <a:avLst/>
+          </a:prstGeom>
+          <a:noFill/>
+          <a:ln/>
+        </p:spPr>
+        <p:txBody>
+          <a:bodyPr wrap="square" lIns="0" tIns="0" rIns="0" bIns="0" rtlCol="0" anchor="t"/>
+          <a:lstStyle/>
+          <a:p>
+            <a:pPr indent="0" marL="0">
+              <a:buNone/>
+            </a:pPr>
+            <a:r>
+              <a:rPr lang="en-US" sz="1200" b="1" dirty="0">
+                <a:solidFill>
+                  <a:schemeClr val="tx2"/>
+                </a:solidFill>
+              </a:rPr>
+              <a:t>Tesla, 2019: </a:t>
+            </a:r>
+            <a:pPr indent="0" marL="0">
+              <a:buNone/>
+            </a:pPr>
+            <a:r>
+              <a:rPr lang="en-US" sz="1200" dirty="0">
+                <a:solidFill>
+                  <a:schemeClr val="tx1"/>
+                </a:solidFill>
+              </a:rPr>
+              <a:t>jurado ordenó pagar US$329 M por una muerte con Autopilot.</a:t>
+            </a:r>
+            <a:endParaRPr lang="en-US" sz="1200" dirty="0"/>
+          </a:p>
+        </p:txBody>
+      </p:sp>
+      <p:sp>
+        <p:nvSpPr>
+          <p:cNvPr id="28" name="Shape 19"/>
+          <p:cNvSpPr/>
+          <p:nvPr/>
+        </p:nvSpPr>
+        <p:spPr>
+          <a:xfrm>
+            <a:off x="4846320" y="3877056"/>
+            <a:ext cx="457200" cy="457200"/>
+          </a:xfrm>
+          <a:prstGeom prst="ellipse">
+            <a:avLst/>
+          </a:prstGeom>
+          <a:solidFill>
+            <a:schemeClr val="accent2"/>
+          </a:solidFill>
+          <a:ln/>
+        </p:spPr>
+      </p:sp>
+      <p:pic>
+        <p:nvPicPr>
+          <p:cNvPr id="29" name="Image 7" descr="preencoded.png">    </p:cNvPr>
+          <p:cNvPicPr>
+            <a:picLocks noChangeAspect="1"/>
+          </p:cNvPicPr>
+          <p:nvPr/>
+        </p:nvPicPr>
+        <p:blipFill>
+          <a:blip r:embed="rId8"/>
+          <a:stretch>
+            <a:fillRect/>
+          </a:stretch>
+        </p:blipFill>
+        <p:spPr>
+          <a:xfrm>
+            <a:off x="4960620" y="3991356"/>
+            <a:ext cx="228600" cy="228600"/>
+          </a:xfrm>
+          <a:prstGeom prst="rect">
+            <a:avLst/>
+          </a:prstGeom>
+        </p:spPr>
+      </p:pic>
+      <p:sp>
+        <p:nvSpPr>
+          <p:cNvPr id="30" name="Text 20"/>
+          <p:cNvSpPr txBox="1"/>
+          <p:nvPr/>
+        </p:nvSpPr>
+        <p:spPr>
+          <a:xfrm>
+            <a:off x="5440680" y="3858768"/>
+            <a:ext cx="3108960" cy="621792"/>
+          </a:xfrm>
+          <a:prstGeom prst="rect">
+            <a:avLst/>
+          </a:prstGeom>
+          <a:noFill/>
+          <a:ln/>
+        </p:spPr>
+        <p:txBody>
+          <a:bodyPr wrap="square" lIns="0" tIns="0" rIns="0" bIns="0" rtlCol="0" anchor="t"/>
+          <a:lstStyle/>
+          <a:p>
+            <a:pPr indent="0" marL="0">
+              <a:buNone/>
+            </a:pPr>
+            <a:r>
+              <a:rPr lang="en-US" sz="1200" b="1" dirty="0">
+                <a:solidFill>
+                  <a:schemeClr val="tx2"/>
+                </a:solidFill>
+              </a:rPr>
+              <a:t>Uber, 2018: </a:t>
+            </a:r>
+            <a:pPr indent="0" marL="0">
+              <a:buNone/>
+            </a:pPr>
+            <a:r>
+              <a:rPr lang="en-US" sz="1200" dirty="0">
+                <a:solidFill>
+                  <a:schemeClr val="tx1"/>
+                </a:solidFill>
+              </a:rPr>
+              <a:t>atropello mortal en Arizona; terminó en acuerdo con la familia.</a:t>
+            </a:r>
+            <a:endParaRPr lang="en-US" sz="1200" dirty="0"/>
+          </a:p>
+        </p:txBody>
+      </p:sp>
+      <p:sp>
+        <p:nvSpPr>
+          <p:cNvPr id="31" name="Text 21"/>
+          <p:cNvSpPr txBox="1"/>
+          <p:nvPr/>
+        </p:nvSpPr>
+        <p:spPr>
+          <a:xfrm>
             <a:off x="457200" y="4709160"/>
-            <a:ext cx="5486400" cy="274320"/>
+            <a:ext cx="7315200" cy="274320"/>
           </a:xfrm>
           <a:prstGeom prst="rect">
             <a:avLst/>
@@ -4250,7 +3650,7 @@
                   <a:schemeClr val="accent5"/>
                 </a:solidFill>
               </a:rPr>
-              <a:t>Fuentes: InfoJobs (s. f.); Computrabajo México (s. f.)</a:t>
+              <a:t>Fuentes: InfoJobs; Computrabajo; William Mattar (2026); Marcari (2026); Jamali (2025); Cano (2018)</a:t>
             </a:r>
             <a:endParaRPr lang="en-US" sz="1000" dirty="0"/>
           </a:p>
@@ -4358,7 +3758,7 @@
                   <a:schemeClr val="tx2"/>
                 </a:solidFill>
               </a:rPr>
-              <a:t>¿Quién responde si no hay conductor?</a:t>
+              <a:t>Tecnología real: sistemas WMS y TMS</a:t>
             </a:r>
             <a:endParaRPr lang="en-US" sz="2800" dirty="0"/>
           </a:p>
@@ -4373,11 +3773,11 @@
         <p:spPr>
           <a:xfrm>
             <a:off x="457200" y="1143000"/>
-            <a:ext cx="2615184" cy="3383280"/>
+            <a:ext cx="4023360" cy="2926080"/>
           </a:xfrm>
           <a:prstGeom prst="roundRect">
             <a:avLst>
-              <a:gd name="adj" fmla="val 4196"/>
+              <a:gd name="adj" fmla="val 3750"/>
             </a:avLst>
           </a:prstGeom>
           <a:solidFill>
@@ -4394,8 +3794,8 @@
         </p:nvSpPr>
         <p:spPr>
           <a:xfrm>
-            <a:off x="685800" y="1371600"/>
-            <a:ext cx="731520" cy="731520"/>
+            <a:off x="685800" y="1325880"/>
+            <a:ext cx="685800" cy="685800"/>
           </a:xfrm>
           <a:prstGeom prst="ellipse">
             <a:avLst/>
@@ -4422,8 +3822,8 @@
         </p:blipFill>
         <p:spPr>
           <a:xfrm>
-            <a:off x="868680" y="1554480"/>
-            <a:ext cx="365760" cy="365760"/>
+            <a:off x="857250" y="1497330"/>
+            <a:ext cx="342900" cy="342900"/>
           </a:xfrm>
           <a:prstGeom prst="rect">
             <a:avLst/>
@@ -4438,8 +3838,8 @@
         </p:nvSpPr>
         <p:spPr>
           <a:xfrm>
-            <a:off x="685800" y="2240280"/>
-            <a:ext cx="2194560" cy="365760"/>
+            <a:off x="1508760" y="1463040"/>
+            <a:ext cx="2834640" cy="411480"/>
           </a:xfrm>
           <a:prstGeom prst="rect">
             <a:avLst/>
@@ -4455,14 +3855,14 @@
               <a:buNone/>
             </a:pPr>
             <a:r>
-              <a:rPr lang="en-US" sz="1700" b="1" dirty="0">
+              <a:rPr lang="en-US" sz="1600" b="1" dirty="0">
                 <a:solidFill>
                   <a:schemeClr val="tx2"/>
                 </a:solidFill>
               </a:rPr>
-              <a:t>El fabricante</a:t>
-            </a:r>
-            <a:endParaRPr lang="en-US" sz="1700" dirty="0"/>
+              <a:t>WMS · Gestión de Almacenes</a:t>
+            </a:r>
+            <a:endParaRPr lang="en-US" sz="1600" dirty="0"/>
           </a:p>
         </p:txBody>
       </p:sp>
@@ -4474,8 +3874,8 @@
         </p:nvSpPr>
         <p:spPr>
           <a:xfrm>
-            <a:off x="685800" y="2651760"/>
-            <a:ext cx="2194560" cy="1783080"/>
+            <a:off x="685800" y="2148840"/>
+            <a:ext cx="3566160" cy="640080"/>
           </a:xfrm>
           <a:prstGeom prst="rect">
             <a:avLst/>
@@ -4491,31 +3891,107 @@
               <a:buNone/>
             </a:pPr>
             <a:r>
-              <a:rPr lang="en-US" sz="1350" dirty="0">
+              <a:rPr lang="en-US" sz="1300" i="1" dirty="0">
                 <a:solidFill>
                   <a:schemeClr val="tx1"/>
                 </a:solidFill>
               </a:rPr>
-              <a:t>Si el vehículo o su software fallan, el fabricante suele tener cierta responsabilidad. El jurista Bryant Walker Smith sostiene que los fabricantes responden por los daños.</a:t>
-            </a:r>
-            <a:endParaRPr lang="en-US" sz="1350" dirty="0"/>
-          </a:p>
-        </p:txBody>
-      </p:sp>
-      <p:sp>
-        <p:nvSpPr>
-          <p:cNvPr id="8" name="Shape 5"/>
+              <a:t>Gestiona los flujos físicos dentro del almacén y los muelles.</a:t>
+            </a:r>
+            <a:endParaRPr lang="en-US" sz="1300" dirty="0"/>
+          </a:p>
+        </p:txBody>
+      </p:sp>
+      <p:sp>
+        <p:nvSpPr>
+          <p:cNvPr id="8" name="Text 5"/>
+          <p:cNvSpPr txBox="1"/>
+          <p:nvPr/>
+        </p:nvSpPr>
+        <p:spPr>
+          <a:xfrm>
+            <a:off x="685800" y="2834640"/>
+            <a:ext cx="3566160" cy="1097280"/>
+          </a:xfrm>
+          <a:prstGeom prst="rect">
+            <a:avLst/>
+          </a:prstGeom>
+          <a:noFill/>
+          <a:ln/>
+        </p:spPr>
+        <p:txBody>
+          <a:bodyPr wrap="square" lIns="0" tIns="0" rIns="0" bIns="0" rtlCol="0" anchor="t"/>
+          <a:lstStyle/>
+          <a:p>
+            <a:pPr marL="342900" indent="-342900">
+              <a:spcAft>
+                <a:spcPts val="400"/>
+              </a:spcAft>
+              <a:buSzPct val="100000"/>
+              <a:buChar char="•"/>
+            </a:pPr>
+            <a:r>
+              <a:rPr lang="en-US" sz="1300" dirty="0">
+                <a:solidFill>
+                  <a:schemeClr val="tx1"/>
+                </a:solidFill>
+              </a:rPr>
+              <a:t>Mayor visibilidad de inventarios</a:t>
+            </a:r>
+            <a:endParaRPr lang="en-US" sz="1300" dirty="0"/>
+          </a:p>
+          <a:p>
+            <a:pPr marL="342900" indent="-342900">
+              <a:spcAft>
+                <a:spcPts val="400"/>
+              </a:spcAft>
+              <a:buSzPct val="100000"/>
+              <a:buChar char="•"/>
+            </a:pPr>
+            <a:r>
+              <a:rPr lang="en-US" sz="1300" dirty="0">
+                <a:solidFill>
+                  <a:schemeClr val="tx1"/>
+                </a:solidFill>
+              </a:rPr>
+              <a:t>Optimización de procesos</a:t>
+            </a:r>
+            <a:endParaRPr lang="en-US" sz="1300" dirty="0"/>
+          </a:p>
+          <a:p>
+            <a:pPr marL="342900" indent="-342900">
+              <a:spcAft>
+                <a:spcPts val="400"/>
+              </a:spcAft>
+              <a:buSzPct val="100000"/>
+              <a:buChar char="•"/>
+            </a:pPr>
+            <a:r>
+              <a:rPr lang="en-US" sz="1300" dirty="0">
+                <a:solidFill>
+                  <a:schemeClr val="tx1"/>
+                </a:solidFill>
+              </a:rPr>
+              <a:t>Menos tareas de bajo valor</a:t>
+            </a:r>
+            <a:endParaRPr lang="en-US" sz="1300" dirty="0"/>
+          </a:p>
+        </p:txBody>
+      </p:sp>
+      <p:sp>
+        <p:nvSpPr>
+          <p:cNvPr id="9" name="Shape 6"/>
           <p:cNvSpPr/>
           <p:nvPr/>
         </p:nvSpPr>
         <p:spPr>
           <a:xfrm>
-            <a:off x="3264408" y="1143000"/>
-            <a:ext cx="2615184" cy="3383280"/>
+            <a:off x="4663440" y="1143000"/>
+            <a:ext cx="4023360" cy="2926080"/>
           </a:xfrm>
           <a:prstGeom prst="roundRect">
             <a:avLst>
-              <a:gd name="adj" fmla="val 4196"/>
+              <a:gd name="adj" fmla="val 3750"/>
             </a:avLst>
           </a:prstGeom>
           <a:solidFill>
@@ -4526,14 +4002,14 @@
       </p:sp>
       <p:sp>
         <p:nvSpPr>
-          <p:cNvPr id="9" name="Shape 6"/>
+          <p:cNvPr id="10" name="Shape 7"/>
           <p:cNvSpPr/>
           <p:nvPr/>
         </p:nvSpPr>
         <p:spPr>
           <a:xfrm>
-            <a:off x="3493008" y="1371600"/>
-            <a:ext cx="731520" cy="731520"/>
+            <a:off x="4892040" y="1325880"/>
+            <a:ext cx="685800" cy="685800"/>
           </a:xfrm>
           <a:prstGeom prst="ellipse">
             <a:avLst/>
@@ -4546,7 +4022,7 @@
       </p:sp>
       <p:pic>
         <p:nvPicPr>
-          <p:cNvPr id="10" name="Image 1" descr="preencoded.png">    </p:cNvPr>
+          <p:cNvPr id="11" name="Image 1" descr="preencoded.png">    </p:cNvPr>
           <p:cNvPicPr>
             <a:picLocks noChangeAspect="1"/>
           </p:cNvPicPr>
@@ -4560,50 +4036,14 @@
         </p:blipFill>
         <p:spPr>
           <a:xfrm>
-            <a:off x="3675888" y="1554480"/>
-            <a:ext cx="365760" cy="365760"/>
+            <a:off x="5063490" y="1497330"/>
+            <a:ext cx="342900" cy="342900"/>
           </a:xfrm>
           <a:prstGeom prst="rect">
             <a:avLst/>
           </a:prstGeom>
         </p:spPr>
       </p:pic>
-      <p:sp>
-        <p:nvSpPr>
-          <p:cNvPr id="11" name="Text 7"/>
-          <p:cNvSpPr txBox="1"/>
-          <p:nvPr/>
-        </p:nvSpPr>
-        <p:spPr>
-          <a:xfrm>
-            <a:off x="3493008" y="2240280"/>
-            <a:ext cx="2194560" cy="365760"/>
-          </a:xfrm>
-          <a:prstGeom prst="rect">
-            <a:avLst/>
-          </a:prstGeom>
-          <a:noFill/>
-          <a:ln/>
-        </p:spPr>
-        <p:txBody>
-          <a:bodyPr wrap="square" lIns="0" tIns="0" rIns="0" bIns="0" rtlCol="0" anchor="t"/>
-          <a:lstStyle/>
-          <a:p>
-            <a:pPr indent="0" marL="0">
-              <a:buNone/>
-            </a:pPr>
-            <a:r>
-              <a:rPr lang="en-US" sz="1700" b="1" dirty="0">
-                <a:solidFill>
-                  <a:schemeClr val="tx2"/>
-                </a:solidFill>
-              </a:rPr>
-              <a:t>El conductor</a:t>
-            </a:r>
-            <a:endParaRPr lang="en-US" sz="1700" dirty="0"/>
-          </a:p>
-        </p:txBody>
-      </p:sp>
       <p:sp>
         <p:nvSpPr>
           <p:cNvPr id="12" name="Text 8"/>
@@ -4612,8 +4052,8 @@
         </p:nvSpPr>
         <p:spPr>
           <a:xfrm>
-            <a:off x="3493008" y="2651760"/>
-            <a:ext cx="2194560" cy="1783080"/>
+            <a:off x="5715000" y="1463040"/>
+            <a:ext cx="2834640" cy="411480"/>
           </a:xfrm>
           <a:prstGeom prst="rect">
             <a:avLst/>
@@ -4629,93 +4069,63 @@
               <a:buNone/>
             </a:pPr>
             <a:r>
-              <a:rPr lang="en-US" sz="1350" dirty="0">
+              <a:rPr lang="en-US" sz="1600" b="1" dirty="0">
+                <a:solidFill>
+                  <a:schemeClr val="tx2"/>
+                </a:solidFill>
+              </a:rPr>
+              <a:t>TMS · Gestión del Transporte</a:t>
+            </a:r>
+            <a:endParaRPr lang="en-US" sz="1600" dirty="0"/>
+          </a:p>
+        </p:txBody>
+      </p:sp>
+      <p:sp>
+        <p:nvSpPr>
+          <p:cNvPr id="13" name="Text 9"/>
+          <p:cNvSpPr txBox="1"/>
+          <p:nvPr/>
+        </p:nvSpPr>
+        <p:spPr>
+          <a:xfrm>
+            <a:off x="4892040" y="2148840"/>
+            <a:ext cx="3566160" cy="640080"/>
+          </a:xfrm>
+          <a:prstGeom prst="rect">
+            <a:avLst/>
+          </a:prstGeom>
+          <a:noFill/>
+          <a:ln/>
+        </p:spPr>
+        <p:txBody>
+          <a:bodyPr wrap="square" lIns="0" tIns="0" rIns="0" bIns="0" rtlCol="0" anchor="t"/>
+          <a:lstStyle/>
+          <a:p>
+            <a:pPr indent="0" marL="0">
+              <a:buNone/>
+            </a:pPr>
+            <a:r>
+              <a:rPr lang="en-US" sz="1300" i="1" dirty="0">
                 <a:solidFill>
                   <a:schemeClr val="tx1"/>
                 </a:solidFill>
               </a:rPr>
-              <a:t>En autos parcialmente autónomos, si el sistema alerta y el conductor no toma el control, puede ser responsable del accidente.</a:t>
-            </a:r>
-            <a:endParaRPr lang="en-US" sz="1350" dirty="0"/>
-          </a:p>
-        </p:txBody>
-      </p:sp>
-      <p:sp>
-        <p:nvSpPr>
-          <p:cNvPr id="13" name="Shape 9"/>
-          <p:cNvSpPr/>
-          <p:nvPr/>
-        </p:nvSpPr>
-        <p:spPr>
-          <a:xfrm>
-            <a:off x="6071616" y="1143000"/>
-            <a:ext cx="2615184" cy="3383280"/>
-          </a:xfrm>
-          <a:prstGeom prst="roundRect">
-            <a:avLst>
-              <a:gd name="adj" fmla="val 4196"/>
-            </a:avLst>
-          </a:prstGeom>
-          <a:solidFill>
-            <a:schemeClr val="bg2"/>
-          </a:solidFill>
-          <a:ln/>
-        </p:spPr>
-      </p:sp>
-      <p:sp>
-        <p:nvSpPr>
-          <p:cNvPr id="14" name="Shape 10"/>
-          <p:cNvSpPr/>
-          <p:nvPr/>
-        </p:nvSpPr>
-        <p:spPr>
-          <a:xfrm>
-            <a:off x="6300216" y="1371600"/>
-            <a:ext cx="731520" cy="731520"/>
-          </a:xfrm>
-          <a:prstGeom prst="ellipse">
-            <a:avLst/>
-          </a:prstGeom>
-          <a:solidFill>
-            <a:schemeClr val="accent3"/>
-          </a:solidFill>
-          <a:ln/>
-        </p:spPr>
-      </p:sp>
-      <p:pic>
-        <p:nvPicPr>
-          <p:cNvPr id="15" name="Image 2" descr="preencoded.png">    </p:cNvPr>
-          <p:cNvPicPr>
-            <a:picLocks noChangeAspect="1"/>
-          </p:cNvPicPr>
-          <p:nvPr/>
-        </p:nvPicPr>
-        <p:blipFill>
-          <a:blip r:embed="rId3"/>
-          <a:stretch>
-            <a:fillRect/>
-          </a:stretch>
-        </p:blipFill>
-        <p:spPr>
-          <a:xfrm>
-            <a:off x="6483096" y="1554480"/>
-            <a:ext cx="365760" cy="365760"/>
-          </a:xfrm>
-          <a:prstGeom prst="rect">
-            <a:avLst/>
-          </a:prstGeom>
-        </p:spPr>
-      </p:pic>
-      <p:sp>
-        <p:nvSpPr>
-          <p:cNvPr id="16" name="Text 11"/>
+              <a:t>Consolida envíos, planifica rutas, asigna recursos y supervisa entregas.</a:t>
+            </a:r>
+            <a:endParaRPr lang="en-US" sz="1300" dirty="0"/>
+          </a:p>
+        </p:txBody>
+      </p:sp>
+      <p:sp>
+        <p:nvSpPr>
+          <p:cNvPr id="14" name="Text 10"/>
           <p:cNvSpPr txBox="1"/>
           <p:nvPr/>
         </p:nvSpPr>
         <p:spPr>
           <a:xfrm>
-            <a:off x="6300216" y="2240280"/>
-            <a:ext cx="2194560" cy="365760"/>
+            <a:off x="4892040" y="2834640"/>
+            <a:ext cx="3566160" cy="1097280"/>
           </a:xfrm>
           <a:prstGeom prst="rect">
             <a:avLst/>
@@ -4727,60 +4137,100 @@
           <a:bodyPr wrap="square" lIns="0" tIns="0" rIns="0" bIns="0" rtlCol="0" anchor="t"/>
           <a:lstStyle/>
           <a:p>
+            <a:pPr marL="342900" indent="-342900">
+              <a:spcAft>
+                <a:spcPts val="400"/>
+              </a:spcAft>
+              <a:buSzPct val="100000"/>
+              <a:buChar char="•"/>
+            </a:pPr>
+            <a:r>
+              <a:rPr lang="en-US" sz="1300" dirty="0">
+                <a:solidFill>
+                  <a:schemeClr val="tx1"/>
+                </a:solidFill>
+              </a:rPr>
+              <a:t>Menores costos de transporte</a:t>
+            </a:r>
+            <a:endParaRPr lang="en-US" sz="1300" dirty="0"/>
+          </a:p>
+          <a:p>
+            <a:pPr marL="342900" indent="-342900">
+              <a:spcAft>
+                <a:spcPts val="400"/>
+              </a:spcAft>
+              <a:buSzPct val="100000"/>
+              <a:buChar char="•"/>
+            </a:pPr>
+            <a:r>
+              <a:rPr lang="en-US" sz="1300" dirty="0">
+                <a:solidFill>
+                  <a:schemeClr val="tx1"/>
+                </a:solidFill>
+              </a:rPr>
+              <a:t>Mejor trazabilidad de envíos</a:t>
+            </a:r>
+            <a:endParaRPr lang="en-US" sz="1300" dirty="0"/>
+          </a:p>
+          <a:p>
+            <a:pPr marL="342900" indent="-342900">
+              <a:spcAft>
+                <a:spcPts val="400"/>
+              </a:spcAft>
+              <a:buSzPct val="100000"/>
+              <a:buChar char="•"/>
+            </a:pPr>
+            <a:r>
+              <a:rPr lang="en-US" sz="1300" dirty="0">
+                <a:solidFill>
+                  <a:schemeClr val="tx1"/>
+                </a:solidFill>
+              </a:rPr>
+              <a:t>Mayor seguridad en procesos</a:t>
+            </a:r>
+            <a:endParaRPr lang="en-US" sz="1300" dirty="0"/>
+          </a:p>
+        </p:txBody>
+      </p:sp>
+      <p:sp>
+        <p:nvSpPr>
+          <p:cNvPr id="15" name="Text 11"/>
+          <p:cNvSpPr txBox="1"/>
+          <p:nvPr/>
+        </p:nvSpPr>
+        <p:spPr>
+          <a:xfrm>
+            <a:off x="457200" y="4206240"/>
+            <a:ext cx="8229600" cy="365760"/>
+          </a:xfrm>
+          <a:prstGeom prst="rect">
+            <a:avLst/>
+          </a:prstGeom>
+          <a:noFill/>
+          <a:ln/>
+        </p:spPr>
+        <p:txBody>
+          <a:bodyPr wrap="square" lIns="0" tIns="0" rIns="0" bIns="0" rtlCol="0" anchor="t"/>
+          <a:lstStyle/>
+          <a:p>
             <a:pPr indent="0" marL="0">
               <a:buNone/>
             </a:pPr>
             <a:r>
-              <a:rPr lang="en-US" sz="1700" b="1" dirty="0">
-                <a:solidFill>
-                  <a:schemeClr val="tx2"/>
-                </a:solidFill>
-              </a:rPr>
-              <a:t>La ley</a:t>
-            </a:r>
-            <a:endParaRPr lang="en-US" sz="1700" dirty="0"/>
-          </a:p>
-        </p:txBody>
-      </p:sp>
-      <p:sp>
-        <p:nvSpPr>
-          <p:cNvPr id="17" name="Text 12"/>
-          <p:cNvSpPr txBox="1"/>
-          <p:nvPr/>
-        </p:nvSpPr>
-        <p:spPr>
-          <a:xfrm>
-            <a:off x="6300216" y="2651760"/>
-            <a:ext cx="2194560" cy="1783080"/>
-          </a:xfrm>
-          <a:prstGeom prst="rect">
-            <a:avLst/>
-          </a:prstGeom>
-          <a:noFill/>
-          <a:ln/>
-        </p:spPr>
-        <p:txBody>
-          <a:bodyPr wrap="square" lIns="0" tIns="0" rIns="0" bIns="0" rtlCol="0" anchor="t"/>
-          <a:lstStyle/>
-          <a:p>
-            <a:pPr indent="0" marL="0">
-              <a:buNone/>
-            </a:pPr>
-            <a:r>
-              <a:rPr lang="en-US" sz="1350" dirty="0">
-                <a:solidFill>
-                  <a:schemeClr val="tx1"/>
-                </a:solidFill>
-              </a:rPr>
-              <a:t>La propuesta AV START (EE. UU.) llevaría las disputas a arbitraje privado. Hoy, muchos estados culpan a la parte negligente y a su aseguradora.</a:t>
-            </a:r>
-            <a:endParaRPr lang="en-US" sz="1350" dirty="0"/>
-          </a:p>
-        </p:txBody>
-      </p:sp>
-      <p:sp>
-        <p:nvSpPr>
-          <p:cNvPr id="18" name="Text 13"/>
+              <a:rPr lang="en-US" sz="1400" b="1" dirty="0">
+                <a:solidFill>
+                  <a:schemeClr val="accent2"/>
+                </a:solidFill>
+              </a:rPr>
+              <a:t>Integrados: más productividad y menos errores en toda la cadena de suministro.</a:t>
+            </a:r>
+            <a:endParaRPr lang="en-US" sz="1400" dirty="0"/>
+          </a:p>
+        </p:txBody>
+      </p:sp>
+      <p:sp>
+        <p:nvSpPr>
+          <p:cNvPr id="16" name="Text 12"/>
           <p:cNvSpPr txBox="1"/>
           <p:nvPr/>
         </p:nvSpPr>
@@ -4808,7 +4258,7 @@
                   <a:schemeClr val="accent5"/>
                 </a:solidFill>
               </a:rPr>
-              <a:t>Fuentes: William Mattar (2026); Marcari &amp; Marcari (2026)</a:t>
+              <a:t>Fuente: Desnos (2026), Shiptify</a:t>
             </a:r>
             <a:endParaRPr lang="en-US" sz="1000" dirty="0"/>
           </a:p>
@@ -4916,7 +4366,7 @@
                   <a:schemeClr val="tx2"/>
                 </a:solidFill>
               </a:rPr>
-              <a:t>Caso 1: Tesla Autopilot (Florida, 2019)</a:t>
+              <a:t>Beneficio concreto: menos costos y errores</a:t>
             </a:r>
             <a:endParaRPr lang="en-US" sz="2800" dirty="0"/>
           </a:p>
@@ -4930,8 +4380,8 @@
         </p:nvSpPr>
         <p:spPr>
           <a:xfrm>
-            <a:off x="457200" y="1188720"/>
-            <a:ext cx="4754880" cy="3291840"/>
+            <a:off x="457200" y="1051560"/>
+            <a:ext cx="8229600" cy="457200"/>
           </a:xfrm>
           <a:prstGeom prst="rect">
             <a:avLst/>
@@ -4943,76 +4393,18 @@
           <a:bodyPr wrap="square" lIns="0" tIns="0" rIns="0" bIns="0" rtlCol="0" anchor="t"/>
           <a:lstStyle/>
           <a:p>
-            <a:pPr marL="342900" indent="-342900">
-              <a:spcAft>
-                <a:spcPts val="800"/>
-              </a:spcAft>
-              <a:buSzPct val="100000"/>
-              <a:buChar char="•"/>
-            </a:pPr>
-            <a:r>
-              <a:rPr lang="en-US" sz="1400" dirty="0">
+            <a:pPr indent="0" marL="0">
+              <a:buNone/>
+            </a:pPr>
+            <a:r>
+              <a:rPr lang="en-US" sz="1500" dirty="0">
                 <a:solidFill>
                   <a:schemeClr val="tx1"/>
                 </a:solidFill>
               </a:rPr>
-              <a:t>Un Model S atropelló a Naibel Benavides (22 años) en los Cayos de Florida; su novio, Dillon Angulo, quedó con lesiones de por vida.</a:t>
-            </a:r>
-            <a:endParaRPr lang="en-US" sz="1400" dirty="0"/>
-          </a:p>
-          <a:p>
-            <a:pPr marL="342900" indent="-342900">
-              <a:spcAft>
-                <a:spcPts val="800"/>
-              </a:spcAft>
-              <a:buSzPct val="100000"/>
-              <a:buChar char="•"/>
-            </a:pPr>
-            <a:r>
-              <a:rPr lang="en-US" sz="1400" dirty="0">
-                <a:solidFill>
-                  <a:schemeClr val="tx1"/>
-                </a:solidFill>
-              </a:rPr>
-              <a:t>El conductor perdió de vista el camino al caérsele el teléfono.</a:t>
-            </a:r>
-            <a:endParaRPr lang="en-US" sz="1400" dirty="0"/>
-          </a:p>
-          <a:p>
-            <a:pPr marL="342900" indent="-342900">
-              <a:spcAft>
-                <a:spcPts val="800"/>
-              </a:spcAft>
-              <a:buSzPct val="100000"/>
-              <a:buChar char="•"/>
-            </a:pPr>
-            <a:r>
-              <a:rPr lang="en-US" sz="1400" dirty="0">
-                <a:solidFill>
-                  <a:schemeClr val="tx1"/>
-                </a:solidFill>
-              </a:rPr>
-              <a:t>Acusación: Tesla no restringió Autopilot fuera de autopistas mientras afirmaba que conducía mejor que un humano.</a:t>
-            </a:r>
-            <a:endParaRPr lang="en-US" sz="1400" dirty="0"/>
-          </a:p>
-          <a:p>
-            <a:pPr marL="342900" indent="-342900">
-              <a:spcAft>
-                <a:spcPts val="800"/>
-              </a:spcAft>
-              <a:buSzPct val="100000"/>
-              <a:buChar char="•"/>
-            </a:pPr>
-            <a:r>
-              <a:rPr lang="en-US" sz="1400" dirty="0">
-                <a:solidFill>
-                  <a:schemeClr val="tx1"/>
-                </a:solidFill>
-              </a:rPr>
-              <a:t>Tesla culpó al conductor: iba con exceso de velocidad y el pie en el acelerador.</a:t>
-            </a:r>
-            <a:endParaRPr lang="en-US" sz="1400" dirty="0"/>
+              <a:t>Reducción de costos operativos al optimizar tiempos y minimizar errores en inventarios y envíos.</a:t>
+            </a:r>
+            <a:endParaRPr lang="en-US" sz="1500" dirty="0"/>
           </a:p>
         </p:txBody>
       </p:sp>
@@ -5024,12 +4416,12 @@
         </p:nvSpPr>
         <p:spPr>
           <a:xfrm>
-            <a:off x="5577840" y="1188720"/>
-            <a:ext cx="3108960" cy="3291840"/>
+            <a:off x="457200" y="1737360"/>
+            <a:ext cx="1517904" cy="2377440"/>
           </a:xfrm>
           <a:prstGeom prst="roundRect">
             <a:avLst>
-              <a:gd name="adj" fmla="val 3529"/>
+              <a:gd name="adj" fmla="val 7229"/>
             </a:avLst>
           </a:prstGeom>
           <a:solidFill>
@@ -5046,8 +4438,8 @@
         </p:nvSpPr>
         <p:spPr>
           <a:xfrm>
-            <a:off x="5760720" y="1417320"/>
-            <a:ext cx="2743200" cy="777240"/>
+            <a:off x="502920" y="2011680"/>
+            <a:ext cx="1426464" cy="640080"/>
           </a:xfrm>
           <a:prstGeom prst="rect">
             <a:avLst/>
@@ -5063,7 +4455,7 @@
               <a:buNone/>
             </a:pPr>
             <a:r>
-              <a:rPr lang="en-US" sz="4400" b="1" dirty="0">
+              <a:rPr lang="en-US" sz="2400" b="1" dirty="0">
                 <a:solidFill>
                   <a:schemeClr val="accent1"/>
                 </a:solidFill>
@@ -5071,9 +4463,9 @@
                 <a:ea typeface="Arial" pitchFamily="34" charset="-122"/>
                 <a:cs typeface="Arial" pitchFamily="34" charset="-120"/>
               </a:rPr>
-              <a:t>US$329 M</a:t>
-            </a:r>
-            <a:endParaRPr lang="en-US" sz="4400" dirty="0"/>
+              <a:t>70–90%</a:t>
+            </a:r>
+            <a:endParaRPr lang="en-US" sz="2400" dirty="0"/>
           </a:p>
         </p:txBody>
       </p:sp>
@@ -5085,8 +4477,8 @@
         </p:nvSpPr>
         <p:spPr>
           <a:xfrm>
-            <a:off x="5760720" y="2194560"/>
-            <a:ext cx="2743200" cy="457200"/>
+            <a:off x="594360" y="2788920"/>
+            <a:ext cx="1243584" cy="1188720"/>
           </a:xfrm>
           <a:prstGeom prst="rect">
             <a:avLst/>
@@ -5107,7 +4499,7 @@
                   <a:schemeClr val="bg1"/>
                 </a:solidFill>
               </a:rPr>
-              <a:t>de indemnización otorgada por el jurado</a:t>
+              <a:t>menos errores en preparación y despacho</a:t>
             </a:r>
             <a:endParaRPr lang="en-US" sz="1300" dirty="0"/>
           </a:p>
@@ -5115,95 +4507,25 @@
       </p:sp>
       <p:sp>
         <p:nvSpPr>
-          <p:cNvPr id="7" name="Text 5"/>
-          <p:cNvSpPr txBox="1"/>
-          <p:nvPr/>
-        </p:nvSpPr>
-        <p:spPr>
-          <a:xfrm>
-            <a:off x="5760720" y="2788920"/>
-            <a:ext cx="2743200" cy="1554480"/>
-          </a:xfrm>
-          <a:prstGeom prst="rect">
-            <a:avLst/>
-          </a:prstGeom>
-          <a:noFill/>
-          <a:ln/>
-        </p:spPr>
-        <p:txBody>
-          <a:bodyPr wrap="square" lIns="0" tIns="0" rIns="0" bIns="0" rtlCol="0" anchor="t"/>
-          <a:lstStyle/>
-          <a:p>
-            <a:pPr algn="ctr" indent="0" marL="0">
-              <a:buNone/>
-            </a:pPr>
-            <a:r>
-              <a:rPr lang="en-US" sz="1400" b="1" dirty="0">
-                <a:solidFill>
-                  <a:schemeClr val="accent1"/>
-                </a:solidFill>
-              </a:rPr>
-              <a:t>US$129 M</a:t>
-            </a:r>
-            <a:endParaRPr lang="en-US" sz="1400" dirty="0"/>
-          </a:p>
-          <a:p>
-            <a:pPr algn="ctr" indent="0" marL="0">
-              <a:buNone/>
-            </a:pPr>
-            <a:r>
-              <a:rPr lang="en-US" sz="1400" dirty="0">
-                <a:solidFill>
-                  <a:schemeClr val="bg1"/>
-                </a:solidFill>
-              </a:rPr>
-              <a:t>daños compensatorios</a:t>
-            </a:r>
-            <a:endParaRPr lang="en-US" sz="1400" dirty="0"/>
-          </a:p>
-          <a:p>
-            <a:pPr algn="ctr" indent="0" marL="0">
-              <a:buNone/>
-            </a:pPr>
-            <a:r>
-              <a:rPr lang="en-US" sz="600" dirty="0">
-                <a:solidFill>
-                  <a:schemeClr val="bg1"/>
-                </a:solidFill>
-              </a:rPr>
-              <a:t> </a:t>
-            </a:r>
-            <a:endParaRPr lang="en-US" sz="1400" dirty="0"/>
-          </a:p>
-          <a:p>
-            <a:pPr algn="ctr" indent="0" marL="0">
-              <a:buNone/>
-            </a:pPr>
-            <a:r>
-              <a:rPr lang="en-US" sz="1400" b="1" dirty="0">
-                <a:solidFill>
-                  <a:schemeClr val="accent1"/>
-                </a:solidFill>
-              </a:rPr>
-              <a:t>US$200 M</a:t>
-            </a:r>
-            <a:endParaRPr lang="en-US" sz="1400" dirty="0"/>
-          </a:p>
-          <a:p>
-            <a:pPr algn="ctr" indent="0" marL="0">
-              <a:buNone/>
-            </a:pPr>
-            <a:r>
-              <a:rPr lang="en-US" sz="1400" dirty="0">
-                <a:solidFill>
-                  <a:schemeClr val="bg1"/>
-                </a:solidFill>
-              </a:rPr>
-              <a:t>daños punitivos</a:t>
-            </a:r>
-            <a:endParaRPr lang="en-US" sz="1400" dirty="0"/>
-          </a:p>
-        </p:txBody>
+          <p:cNvPr id="7" name="Shape 5"/>
+          <p:cNvSpPr/>
+          <p:nvPr/>
+        </p:nvSpPr>
+        <p:spPr>
+          <a:xfrm>
+            <a:off x="2135124" y="1737360"/>
+            <a:ext cx="1517904" cy="2377440"/>
+          </a:xfrm>
+          <a:prstGeom prst="roundRect">
+            <a:avLst>
+              <a:gd name="adj" fmla="val 7229"/>
+            </a:avLst>
+          </a:prstGeom>
+          <a:solidFill>
+            <a:schemeClr val="bg2"/>
+          </a:solidFill>
+          <a:ln/>
+        </p:spPr>
       </p:sp>
       <p:sp>
         <p:nvSpPr>
@@ -5213,8 +4535,8 @@
         </p:nvSpPr>
         <p:spPr>
           <a:xfrm>
-            <a:off x="457200" y="4709160"/>
-            <a:ext cx="5486400" cy="274320"/>
+            <a:off x="2180844" y="2011680"/>
+            <a:ext cx="1426464" cy="640080"/>
           </a:xfrm>
           <a:prstGeom prst="rect">
             <a:avLst/>
@@ -5226,18 +4548,348 @@
           <a:bodyPr wrap="square" lIns="0" tIns="0" rIns="0" bIns="0" rtlCol="0" anchor="t"/>
           <a:lstStyle/>
           <a:p>
-            <a:pPr indent="0" marL="0">
-              <a:buNone/>
-            </a:pPr>
-            <a:r>
-              <a:rPr lang="en-US" sz="1000" dirty="0">
-                <a:solidFill>
-                  <a:schemeClr val="accent5"/>
-                </a:solidFill>
-              </a:rPr>
-              <a:t>Fuente: Jamali (2025), BBC News Mundo</a:t>
-            </a:r>
-            <a:endParaRPr lang="en-US" sz="1000" dirty="0"/>
+            <a:pPr algn="ctr" indent="0" marL="0">
+              <a:buNone/>
+            </a:pPr>
+            <a:r>
+              <a:rPr lang="en-US" sz="2400" b="1" dirty="0">
+                <a:solidFill>
+                  <a:schemeClr val="accent2"/>
+                </a:solidFill>
+                <a:latin typeface="Arial" pitchFamily="34" charset="0"/>
+                <a:ea typeface="Arial" pitchFamily="34" charset="-122"/>
+                <a:cs typeface="Arial" pitchFamily="34" charset="-120"/>
+              </a:rPr>
+              <a:t>30–50%</a:t>
+            </a:r>
+            <a:endParaRPr lang="en-US" sz="2400" dirty="0"/>
+          </a:p>
+        </p:txBody>
+      </p:sp>
+      <p:sp>
+        <p:nvSpPr>
+          <p:cNvPr id="9" name="Text 7"/>
+          <p:cNvSpPr txBox="1"/>
+          <p:nvPr/>
+        </p:nvSpPr>
+        <p:spPr>
+          <a:xfrm>
+            <a:off x="2272284" y="2788920"/>
+            <a:ext cx="1243584" cy="1188720"/>
+          </a:xfrm>
+          <a:prstGeom prst="rect">
+            <a:avLst/>
+          </a:prstGeom>
+          <a:noFill/>
+          <a:ln/>
+        </p:spPr>
+        <p:txBody>
+          <a:bodyPr wrap="square" lIns="0" tIns="0" rIns="0" bIns="0" rtlCol="0" anchor="t"/>
+          <a:lstStyle/>
+          <a:p>
+            <a:pPr algn="ctr" indent="0" marL="0">
+              <a:buNone/>
+            </a:pPr>
+            <a:r>
+              <a:rPr lang="en-US" sz="1300" dirty="0">
+                <a:solidFill>
+                  <a:schemeClr val="tx1"/>
+                </a:solidFill>
+              </a:rPr>
+              <a:t>menos tiempos operativos</a:t>
+            </a:r>
+            <a:endParaRPr lang="en-US" sz="1300" dirty="0"/>
+          </a:p>
+        </p:txBody>
+      </p:sp>
+      <p:sp>
+        <p:nvSpPr>
+          <p:cNvPr id="10" name="Shape 8"/>
+          <p:cNvSpPr/>
+          <p:nvPr/>
+        </p:nvSpPr>
+        <p:spPr>
+          <a:xfrm>
+            <a:off x="3813048" y="1737360"/>
+            <a:ext cx="1517904" cy="2377440"/>
+          </a:xfrm>
+          <a:prstGeom prst="roundRect">
+            <a:avLst>
+              <a:gd name="adj" fmla="val 7229"/>
+            </a:avLst>
+          </a:prstGeom>
+          <a:solidFill>
+            <a:schemeClr val="bg2"/>
+          </a:solidFill>
+          <a:ln/>
+        </p:spPr>
+      </p:sp>
+      <p:sp>
+        <p:nvSpPr>
+          <p:cNvPr id="11" name="Text 9"/>
+          <p:cNvSpPr txBox="1"/>
+          <p:nvPr/>
+        </p:nvSpPr>
+        <p:spPr>
+          <a:xfrm>
+            <a:off x="3858768" y="2011680"/>
+            <a:ext cx="1426464" cy="640080"/>
+          </a:xfrm>
+          <a:prstGeom prst="rect">
+            <a:avLst/>
+          </a:prstGeom>
+          <a:noFill/>
+          <a:ln/>
+        </p:spPr>
+        <p:txBody>
+          <a:bodyPr wrap="square" lIns="0" tIns="0" rIns="0" bIns="0" rtlCol="0" anchor="t"/>
+          <a:lstStyle/>
+          <a:p>
+            <a:pPr algn="ctr" indent="0" marL="0">
+              <a:buNone/>
+            </a:pPr>
+            <a:r>
+              <a:rPr lang="en-US" sz="2400" b="1" dirty="0">
+                <a:solidFill>
+                  <a:schemeClr val="accent2"/>
+                </a:solidFill>
+                <a:latin typeface="Arial" pitchFamily="34" charset="0"/>
+                <a:ea typeface="Arial" pitchFamily="34" charset="-122"/>
+                <a:cs typeface="Arial" pitchFamily="34" charset="-120"/>
+              </a:rPr>
+              <a:t>25–60%</a:t>
+            </a:r>
+            <a:endParaRPr lang="en-US" sz="2400" dirty="0"/>
+          </a:p>
+        </p:txBody>
+      </p:sp>
+      <p:sp>
+        <p:nvSpPr>
+          <p:cNvPr id="12" name="Text 10"/>
+          <p:cNvSpPr txBox="1"/>
+          <p:nvPr/>
+        </p:nvSpPr>
+        <p:spPr>
+          <a:xfrm>
+            <a:off x="3950208" y="2788920"/>
+            <a:ext cx="1243584" cy="1188720"/>
+          </a:xfrm>
+          <a:prstGeom prst="rect">
+            <a:avLst/>
+          </a:prstGeom>
+          <a:noFill/>
+          <a:ln/>
+        </p:spPr>
+        <p:txBody>
+          <a:bodyPr wrap="square" lIns="0" tIns="0" rIns="0" bIns="0" rtlCol="0" anchor="t"/>
+          <a:lstStyle/>
+          <a:p>
+            <a:pPr algn="ctr" indent="0" marL="0">
+              <a:buNone/>
+            </a:pPr>
+            <a:r>
+              <a:rPr lang="en-US" sz="1300" dirty="0">
+                <a:solidFill>
+                  <a:schemeClr val="tx1"/>
+                </a:solidFill>
+              </a:rPr>
+              <a:t>más productividad</a:t>
+            </a:r>
+            <a:endParaRPr lang="en-US" sz="1300" dirty="0"/>
+          </a:p>
+        </p:txBody>
+      </p:sp>
+      <p:sp>
+        <p:nvSpPr>
+          <p:cNvPr id="13" name="Shape 11"/>
+          <p:cNvSpPr/>
+          <p:nvPr/>
+        </p:nvSpPr>
+        <p:spPr>
+          <a:xfrm>
+            <a:off x="5490972" y="1737360"/>
+            <a:ext cx="1517904" cy="2377440"/>
+          </a:xfrm>
+          <a:prstGeom prst="roundRect">
+            <a:avLst>
+              <a:gd name="adj" fmla="val 7229"/>
+            </a:avLst>
+          </a:prstGeom>
+          <a:solidFill>
+            <a:schemeClr val="bg2"/>
+          </a:solidFill>
+          <a:ln/>
+        </p:spPr>
+      </p:sp>
+      <p:sp>
+        <p:nvSpPr>
+          <p:cNvPr id="14" name="Text 12"/>
+          <p:cNvSpPr txBox="1"/>
+          <p:nvPr/>
+        </p:nvSpPr>
+        <p:spPr>
+          <a:xfrm>
+            <a:off x="5536692" y="2011680"/>
+            <a:ext cx="1426464" cy="640080"/>
+          </a:xfrm>
+          <a:prstGeom prst="rect">
+            <a:avLst/>
+          </a:prstGeom>
+          <a:noFill/>
+          <a:ln/>
+        </p:spPr>
+        <p:txBody>
+          <a:bodyPr wrap="square" lIns="0" tIns="0" rIns="0" bIns="0" rtlCol="0" anchor="t"/>
+          <a:lstStyle/>
+          <a:p>
+            <a:pPr algn="ctr" indent="0" marL="0">
+              <a:buNone/>
+            </a:pPr>
+            <a:r>
+              <a:rPr lang="en-US" sz="2400" b="1" dirty="0">
+                <a:solidFill>
+                  <a:schemeClr val="accent2"/>
+                </a:solidFill>
+                <a:latin typeface="Arial" pitchFamily="34" charset="0"/>
+                <a:ea typeface="Arial" pitchFamily="34" charset="-122"/>
+                <a:cs typeface="Arial" pitchFamily="34" charset="-120"/>
+              </a:rPr>
+              <a:t>20–40%</a:t>
+            </a:r>
+            <a:endParaRPr lang="en-US" sz="2400" dirty="0"/>
+          </a:p>
+        </p:txBody>
+      </p:sp>
+      <p:sp>
+        <p:nvSpPr>
+          <p:cNvPr id="15" name="Text 13"/>
+          <p:cNvSpPr txBox="1"/>
+          <p:nvPr/>
+        </p:nvSpPr>
+        <p:spPr>
+          <a:xfrm>
+            <a:off x="5628132" y="2788920"/>
+            <a:ext cx="1243584" cy="1188720"/>
+          </a:xfrm>
+          <a:prstGeom prst="rect">
+            <a:avLst/>
+          </a:prstGeom>
+          <a:noFill/>
+          <a:ln/>
+        </p:spPr>
+        <p:txBody>
+          <a:bodyPr wrap="square" lIns="0" tIns="0" rIns="0" bIns="0" rtlCol="0" anchor="t"/>
+          <a:lstStyle/>
+          <a:p>
+            <a:pPr algn="ctr" indent="0" marL="0">
+              <a:buNone/>
+            </a:pPr>
+            <a:r>
+              <a:rPr lang="en-US" sz="1300" dirty="0">
+                <a:solidFill>
+                  <a:schemeClr val="tx1"/>
+                </a:solidFill>
+              </a:rPr>
+              <a:t>optimización del esfuerzo humano</a:t>
+            </a:r>
+            <a:endParaRPr lang="en-US" sz="1300" dirty="0"/>
+          </a:p>
+        </p:txBody>
+      </p:sp>
+      <p:sp>
+        <p:nvSpPr>
+          <p:cNvPr id="16" name="Shape 14"/>
+          <p:cNvSpPr/>
+          <p:nvPr/>
+        </p:nvSpPr>
+        <p:spPr>
+          <a:xfrm>
+            <a:off x="7168896" y="1737360"/>
+            <a:ext cx="1517904" cy="2377440"/>
+          </a:xfrm>
+          <a:prstGeom prst="roundRect">
+            <a:avLst>
+              <a:gd name="adj" fmla="val 7229"/>
+            </a:avLst>
+          </a:prstGeom>
+          <a:solidFill>
+            <a:schemeClr val="bg2"/>
+          </a:solidFill>
+          <a:ln/>
+        </p:spPr>
+      </p:sp>
+      <p:sp>
+        <p:nvSpPr>
+          <p:cNvPr id="17" name="Text 15"/>
+          <p:cNvSpPr txBox="1"/>
+          <p:nvPr/>
+        </p:nvSpPr>
+        <p:spPr>
+          <a:xfrm>
+            <a:off x="7214616" y="2011680"/>
+            <a:ext cx="1426464" cy="640080"/>
+          </a:xfrm>
+          <a:prstGeom prst="rect">
+            <a:avLst/>
+          </a:prstGeom>
+          <a:noFill/>
+          <a:ln/>
+        </p:spPr>
+        <p:txBody>
+          <a:bodyPr wrap="square" lIns="0" tIns="0" rIns="0" bIns="0" rtlCol="0" anchor="t"/>
+          <a:lstStyle/>
+          <a:p>
+            <a:pPr algn="ctr" indent="0" marL="0">
+              <a:buNone/>
+            </a:pPr>
+            <a:r>
+              <a:rPr lang="en-US" sz="2400" b="1" dirty="0">
+                <a:solidFill>
+                  <a:schemeClr val="accent2"/>
+                </a:solidFill>
+                <a:latin typeface="Arial" pitchFamily="34" charset="0"/>
+                <a:ea typeface="Arial" pitchFamily="34" charset="-122"/>
+                <a:cs typeface="Arial" pitchFamily="34" charset="-120"/>
+              </a:rPr>
+              <a:t>10–25%</a:t>
+            </a:r>
+            <a:endParaRPr lang="en-US" sz="2400" dirty="0"/>
+          </a:p>
+        </p:txBody>
+      </p:sp>
+      <p:sp>
+        <p:nvSpPr>
+          <p:cNvPr id="18" name="Text 16"/>
+          <p:cNvSpPr txBox="1"/>
+          <p:nvPr/>
+        </p:nvSpPr>
+        <p:spPr>
+          <a:xfrm>
+            <a:off x="7306056" y="2788920"/>
+            <a:ext cx="1243584" cy="1188720"/>
+          </a:xfrm>
+          <a:prstGeom prst="rect">
+            <a:avLst/>
+          </a:prstGeom>
+          <a:noFill/>
+          <a:ln/>
+        </p:spPr>
+        <p:txBody>
+          <a:bodyPr wrap="square" lIns="0" tIns="0" rIns="0" bIns="0" rtlCol="0" anchor="t"/>
+          <a:lstStyle/>
+          <a:p>
+            <a:pPr algn="ctr" indent="0" marL="0">
+              <a:buNone/>
+            </a:pPr>
+            <a:r>
+              <a:rPr lang="en-US" sz="1300" dirty="0">
+                <a:solidFill>
+                  <a:schemeClr val="tx1"/>
+                </a:solidFill>
+              </a:rPr>
+              <a:t>menos costos logísticos totales</a:t>
+            </a:r>
+            <a:endParaRPr lang="en-US" sz="1300" dirty="0"/>
           </a:p>
         </p:txBody>
       </p:sp>
@@ -5343,7 +4995,7 @@
                   <a:schemeClr val="tx2"/>
                 </a:solidFill>
               </a:rPr>
-              <a:t>Caso 2: Uber autónomo (Tempe, Arizona, 2018)</a:t>
+              <a:t>Dilema ético: eficiencia vs. seguridad física</a:t>
             </a:r>
             <a:endParaRPr lang="en-US" sz="2800" dirty="0"/>
           </a:p>
@@ -5357,36 +5009,36 @@
         </p:nvSpPr>
         <p:spPr>
           <a:xfrm>
-            <a:off x="457200" y="1188720"/>
-            <a:ext cx="2743200" cy="3291840"/>
+            <a:off x="457200" y="1143000"/>
+            <a:ext cx="4023360" cy="3337560"/>
           </a:xfrm>
           <a:prstGeom prst="roundRect">
             <a:avLst>
-              <a:gd name="adj" fmla="val 4000"/>
+              <a:gd name="adj" fmla="val 3288"/>
             </a:avLst>
+          </a:prstGeom>
+          <a:solidFill>
+            <a:schemeClr val="bg2"/>
+          </a:solidFill>
+          <a:ln/>
+        </p:spPr>
+      </p:sp>
+      <p:sp>
+        <p:nvSpPr>
+          <p:cNvPr id="4" name="Shape 2"/>
+          <p:cNvSpPr/>
+          <p:nvPr/>
+        </p:nvSpPr>
+        <p:spPr>
+          <a:xfrm>
+            <a:off x="685800" y="1325880"/>
+            <a:ext cx="685800" cy="685800"/>
+          </a:xfrm>
+          <a:prstGeom prst="ellipse">
+            <a:avLst/>
           </a:prstGeom>
           <a:solidFill>
             <a:schemeClr val="accent3"/>
-          </a:solidFill>
-          <a:ln/>
-        </p:spPr>
-      </p:sp>
-      <p:sp>
-        <p:nvSpPr>
-          <p:cNvPr id="4" name="Shape 2"/>
-          <p:cNvSpPr/>
-          <p:nvPr/>
-        </p:nvSpPr>
-        <p:spPr>
-          <a:xfrm>
-            <a:off x="1325880" y="1463040"/>
-            <a:ext cx="1005840" cy="1005840"/>
-          </a:xfrm>
-          <a:prstGeom prst="ellipse">
-            <a:avLst/>
-          </a:prstGeom>
-          <a:solidFill>
-            <a:schemeClr val="tx2"/>
           </a:solidFill>
           <a:ln/>
         </p:spPr>
@@ -5407,8 +5059,8 @@
         </p:blipFill>
         <p:spPr>
           <a:xfrm>
-            <a:off x="1577340" y="1714500"/>
-            <a:ext cx="502920" cy="502920"/>
+            <a:off x="857250" y="1497330"/>
+            <a:ext cx="342900" cy="342900"/>
           </a:xfrm>
           <a:prstGeom prst="rect">
             <a:avLst/>
@@ -5423,8 +5075,8 @@
         </p:nvSpPr>
         <p:spPr>
           <a:xfrm>
-            <a:off x="685800" y="2697480"/>
-            <a:ext cx="2286000" cy="1097280"/>
+            <a:off x="1508760" y="1481328"/>
+            <a:ext cx="2834640" cy="411480"/>
           </a:xfrm>
           <a:prstGeom prst="rect">
             <a:avLst/>
@@ -5436,16 +5088,16 @@
           <a:bodyPr wrap="square" lIns="0" tIns="0" rIns="0" bIns="0" rtlCol="0" anchor="t"/>
           <a:lstStyle/>
           <a:p>
-            <a:pPr algn="ctr" indent="0" marL="0">
+            <a:pPr indent="0" marL="0">
               <a:buNone/>
             </a:pPr>
             <a:r>
               <a:rPr lang="en-US" sz="1600" b="1" dirty="0">
                 <a:solidFill>
-                  <a:schemeClr val="bg1"/>
-                </a:solidFill>
-              </a:rPr>
-              <a:t>Primer atropello mortal de un coche sin conductor</a:t>
+                  <a:schemeClr val="tx2"/>
+                </a:solidFill>
+              </a:rPr>
+              <a:t>La presión del algoritmo</a:t>
             </a:r>
             <a:endParaRPr lang="en-US" sz="1600" dirty="0"/>
           </a:p>
@@ -5459,8 +5111,8 @@
         </p:nvSpPr>
         <p:spPr>
           <a:xfrm>
-            <a:off x="3566160" y="1188720"/>
-            <a:ext cx="5120640" cy="320040"/>
+            <a:off x="685800" y="2194560"/>
+            <a:ext cx="3611880" cy="1005840"/>
           </a:xfrm>
           <a:prstGeom prst="rect">
             <a:avLst/>
@@ -5476,14 +5128,14 @@
               <a:buNone/>
             </a:pPr>
             <a:r>
-              <a:rPr lang="en-US" sz="1600" b="1" dirty="0">
-                <a:solidFill>
-                  <a:schemeClr val="accent2"/>
-                </a:solidFill>
-              </a:rPr>
-              <a:t>Qué pasó</a:t>
-            </a:r>
-            <a:endParaRPr lang="en-US" sz="1600" dirty="0"/>
+              <a:rPr lang="en-US" sz="1400" dirty="0">
+                <a:solidFill>
+                  <a:schemeClr val="tx1"/>
+                </a:solidFill>
+              </a:rPr>
+              <a:t>WMS y TMS fijan tiempos de ruta y ritmos de preparación pensados para el software, no para las personas.</a:t>
+            </a:r>
+            <a:endParaRPr lang="en-US" sz="1400" dirty="0"/>
           </a:p>
         </p:txBody>
       </p:sp>
@@ -5495,8 +5147,8 @@
         </p:nvSpPr>
         <p:spPr>
           <a:xfrm>
-            <a:off x="3566160" y="1536192"/>
-            <a:ext cx="5120640" cy="685800"/>
+            <a:off x="685800" y="3200400"/>
+            <a:ext cx="3611880" cy="1097280"/>
           </a:xfrm>
           <a:prstGeom prst="rect">
             <a:avLst/>
@@ -5512,14 +5164,14 @@
               <a:buNone/>
             </a:pPr>
             <a:r>
-              <a:rPr lang="en-US" sz="1400" dirty="0">
-                <a:solidFill>
-                  <a:schemeClr val="tx1"/>
-                </a:solidFill>
-              </a:rPr>
-              <a:t>Una mujer de 49 años cruzó fuera del paso peatonal y fue arrollada por un vehículo de Uber en modo autónomo.</a:t>
-            </a:r>
-            <a:endParaRPr lang="en-US" sz="1400" dirty="0"/>
+              <a:rPr lang="en-US" sz="1300" i="1" dirty="0">
+                <a:solidFill>
+                  <a:schemeClr val="accent2"/>
+                </a:solidFill>
+              </a:rPr>
+              <a:t>En México, Estafeta, DHL y Grupo Traxion no usan vehículos autónomos: la presión del tiempo recae en el conductor.</a:t>
+            </a:r>
+            <a:endParaRPr lang="en-US" sz="1300" dirty="0"/>
           </a:p>
         </p:txBody>
       </p:sp>
@@ -5531,8 +5183,8 @@
         </p:nvSpPr>
         <p:spPr>
           <a:xfrm>
-            <a:off x="3566160" y="2331720"/>
-            <a:ext cx="5120640" cy="320040"/>
+            <a:off x="4846320" y="1188720"/>
+            <a:ext cx="3840480" cy="365760"/>
           </a:xfrm>
           <a:prstGeom prst="rect">
             <a:avLst/>
@@ -5550,10 +5202,10 @@
             <a:r>
               <a:rPr lang="en-US" sz="1600" b="1" dirty="0">
                 <a:solidFill>
-                  <a:schemeClr val="accent2"/>
-                </a:solidFill>
-              </a:rPr>
-              <a:t>El detalle</a:t>
+                  <a:schemeClr val="accent3"/>
+                </a:solidFill>
+              </a:rPr>
+              <a:t>Consecuencias</a:t>
             </a:r>
             <a:endParaRPr lang="en-US" sz="1600" dirty="0"/>
           </a:p>
@@ -5561,23 +5213,67 @@
       </p:sp>
       <p:sp>
         <p:nvSpPr>
-          <p:cNvPr id="10" name="Text 7"/>
+          <p:cNvPr id="10" name="Shape 7"/>
+          <p:cNvSpPr/>
+          <p:nvPr/>
+        </p:nvSpPr>
+        <p:spPr>
+          <a:xfrm>
+            <a:off x="4846320" y="1691640"/>
+            <a:ext cx="594360" cy="594360"/>
+          </a:xfrm>
+          <a:prstGeom prst="ellipse">
+            <a:avLst/>
+          </a:prstGeom>
+          <a:solidFill>
+            <a:schemeClr val="accent3"/>
+          </a:solidFill>
+          <a:ln/>
+        </p:spPr>
+      </p:sp>
+      <p:pic>
+        <p:nvPicPr>
+          <p:cNvPr id="11" name="Image 1" descr="preencoded.png">    </p:cNvPr>
+          <p:cNvPicPr>
+            <a:picLocks noChangeAspect="1"/>
+          </p:cNvPicPr>
+          <p:nvPr/>
+        </p:nvPicPr>
+        <p:blipFill>
+          <a:blip r:embed="rId2"/>
+          <a:stretch>
+            <a:fillRect/>
+          </a:stretch>
+        </p:blipFill>
+        <p:spPr>
+          <a:xfrm>
+            <a:off x="4994910" y="1840230"/>
+            <a:ext cx="297180" cy="297180"/>
+          </a:xfrm>
+          <a:prstGeom prst="rect">
+            <a:avLst/>
+          </a:prstGeom>
+        </p:spPr>
+      </p:pic>
+      <p:sp>
+        <p:nvSpPr>
+          <p:cNvPr id="12" name="Text 8"/>
           <p:cNvSpPr txBox="1"/>
           <p:nvPr/>
         </p:nvSpPr>
         <p:spPr>
           <a:xfrm>
-            <a:off x="3566160" y="2679192"/>
-            <a:ext cx="5120640" cy="685800"/>
-          </a:xfrm>
-          <a:prstGeom prst="rect">
-            <a:avLst/>
-          </a:prstGeom>
-          <a:noFill/>
-          <a:ln/>
-        </p:spPr>
-        <p:txBody>
-          <a:bodyPr wrap="square" lIns="0" tIns="0" rIns="0" bIns="0" rtlCol="0" anchor="t"/>
+            <a:off x="5623560" y="1709928"/>
+            <a:ext cx="3063240" cy="594360"/>
+          </a:xfrm>
+          <a:prstGeom prst="rect">
+            <a:avLst/>
+          </a:prstGeom>
+          <a:noFill/>
+          <a:ln/>
+        </p:spPr>
+        <p:txBody>
+          <a:bodyPr wrap="square" lIns="0" tIns="0" rIns="0" bIns="0" rtlCol="0" anchor="ctr"/>
           <a:lstStyle/>
           <a:p>
             <a:pPr indent="0" marL="0">
@@ -5589,7 +5285,7 @@
                   <a:schemeClr val="tx1"/>
                 </a:solidFill>
               </a:rPr>
-              <a:t>Había una persona tras el volante, pero el auto circulaba sin conductor activo.</a:t>
+              <a:t>Conductores que manejan fatigados</a:t>
             </a:r>
             <a:endParaRPr lang="en-US" sz="1400" dirty="0"/>
           </a:p>
@@ -5597,59 +5293,147 @@
       </p:sp>
       <p:sp>
         <p:nvSpPr>
-          <p:cNvPr id="11" name="Text 8"/>
+          <p:cNvPr id="13" name="Shape 9"/>
+          <p:cNvSpPr/>
+          <p:nvPr/>
+        </p:nvSpPr>
+        <p:spPr>
+          <a:xfrm>
+            <a:off x="4846320" y="2606040"/>
+            <a:ext cx="594360" cy="594360"/>
+          </a:xfrm>
+          <a:prstGeom prst="ellipse">
+            <a:avLst/>
+          </a:prstGeom>
+          <a:solidFill>
+            <a:schemeClr val="accent3"/>
+          </a:solidFill>
+          <a:ln/>
+        </p:spPr>
+      </p:sp>
+      <p:pic>
+        <p:nvPicPr>
+          <p:cNvPr id="14" name="Image 2" descr="preencoded.png">    </p:cNvPr>
+          <p:cNvPicPr>
+            <a:picLocks noChangeAspect="1"/>
+          </p:cNvPicPr>
+          <p:nvPr/>
+        </p:nvPicPr>
+        <p:blipFill>
+          <a:blip r:embed="rId3"/>
+          <a:stretch>
+            <a:fillRect/>
+          </a:stretch>
+        </p:blipFill>
+        <p:spPr>
+          <a:xfrm>
+            <a:off x="4994910" y="2754630"/>
+            <a:ext cx="297180" cy="297180"/>
+          </a:xfrm>
+          <a:prstGeom prst="rect">
+            <a:avLst/>
+          </a:prstGeom>
+        </p:spPr>
+      </p:pic>
+      <p:sp>
+        <p:nvSpPr>
+          <p:cNvPr id="15" name="Text 10"/>
           <p:cNvSpPr txBox="1"/>
           <p:nvPr/>
         </p:nvSpPr>
         <p:spPr>
           <a:xfrm>
-            <a:off x="3566160" y="3474720"/>
-            <a:ext cx="5120640" cy="320040"/>
-          </a:xfrm>
-          <a:prstGeom prst="rect">
-            <a:avLst/>
-          </a:prstGeom>
-          <a:noFill/>
-          <a:ln/>
-        </p:spPr>
-        <p:txBody>
-          <a:bodyPr wrap="square" lIns="0" tIns="0" rIns="0" bIns="0" rtlCol="0" anchor="t"/>
+            <a:off x="5623560" y="2624328"/>
+            <a:ext cx="3063240" cy="594360"/>
+          </a:xfrm>
+          <a:prstGeom prst="rect">
+            <a:avLst/>
+          </a:prstGeom>
+          <a:noFill/>
+          <a:ln/>
+        </p:spPr>
+        <p:txBody>
+          <a:bodyPr wrap="square" lIns="0" tIns="0" rIns="0" bIns="0" rtlCol="0" anchor="ctr"/>
           <a:lstStyle/>
           <a:p>
             <a:pPr indent="0" marL="0">
               <a:buNone/>
             </a:pPr>
             <a:r>
-              <a:rPr lang="en-US" sz="1600" b="1" dirty="0">
-                <a:solidFill>
-                  <a:schemeClr val="accent2"/>
-                </a:solidFill>
-              </a:rPr>
-              <a:t>Resultado</a:t>
-            </a:r>
-            <a:endParaRPr lang="en-US" sz="1600" dirty="0"/>
-          </a:p>
-        </p:txBody>
-      </p:sp>
-      <p:sp>
-        <p:nvSpPr>
-          <p:cNvPr id="12" name="Text 9"/>
+              <a:rPr lang="en-US" sz="1400" dirty="0">
+                <a:solidFill>
+                  <a:schemeClr val="tx1"/>
+                </a:solidFill>
+              </a:rPr>
+              <a:t>Exceso de los límites de velocidad</a:t>
+            </a:r>
+            <a:endParaRPr lang="en-US" sz="1400" dirty="0"/>
+          </a:p>
+        </p:txBody>
+      </p:sp>
+      <p:sp>
+        <p:nvSpPr>
+          <p:cNvPr id="16" name="Shape 11"/>
+          <p:cNvSpPr/>
+          <p:nvPr/>
+        </p:nvSpPr>
+        <p:spPr>
+          <a:xfrm>
+            <a:off x="4846320" y="3520440"/>
+            <a:ext cx="594360" cy="594360"/>
+          </a:xfrm>
+          <a:prstGeom prst="ellipse">
+            <a:avLst/>
+          </a:prstGeom>
+          <a:solidFill>
+            <a:schemeClr val="accent3"/>
+          </a:solidFill>
+          <a:ln/>
+        </p:spPr>
+      </p:sp>
+      <p:pic>
+        <p:nvPicPr>
+          <p:cNvPr id="17" name="Image 3" descr="preencoded.png">    </p:cNvPr>
+          <p:cNvPicPr>
+            <a:picLocks noChangeAspect="1"/>
+          </p:cNvPicPr>
+          <p:nvPr/>
+        </p:nvPicPr>
+        <p:blipFill>
+          <a:blip r:embed="rId4"/>
+          <a:stretch>
+            <a:fillRect/>
+          </a:stretch>
+        </p:blipFill>
+        <p:spPr>
+          <a:xfrm>
+            <a:off x="4994910" y="3669030"/>
+            <a:ext cx="297180" cy="297180"/>
+          </a:xfrm>
+          <a:prstGeom prst="rect">
+            <a:avLst/>
+          </a:prstGeom>
+        </p:spPr>
+      </p:pic>
+      <p:sp>
+        <p:nvSpPr>
+          <p:cNvPr id="18" name="Text 12"/>
           <p:cNvSpPr txBox="1"/>
           <p:nvPr/>
         </p:nvSpPr>
         <p:spPr>
           <a:xfrm>
-            <a:off x="3566160" y="3822192"/>
-            <a:ext cx="5120640" cy="685800"/>
-          </a:xfrm>
-          <a:prstGeom prst="rect">
-            <a:avLst/>
-          </a:prstGeom>
-          <a:noFill/>
-          <a:ln/>
-        </p:spPr>
-        <p:txBody>
-          <a:bodyPr wrap="square" lIns="0" tIns="0" rIns="0" bIns="0" rtlCol="0" anchor="t"/>
+            <a:off x="5623560" y="3538728"/>
+            <a:ext cx="3063240" cy="594360"/>
+          </a:xfrm>
+          <a:prstGeom prst="rect">
+            <a:avLst/>
+          </a:prstGeom>
+          <a:noFill/>
+          <a:ln/>
+        </p:spPr>
+        <p:txBody>
+          <a:bodyPr wrap="square" lIns="0" tIns="0" rIns="0" bIns="0" rtlCol="0" anchor="ctr"/>
           <a:lstStyle/>
           <a:p>
             <a:pPr indent="0" marL="0">
@@ -5661,45 +5445,9 @@
                   <a:schemeClr val="tx1"/>
                 </a:solidFill>
               </a:rPr>
-              <a:t>No hubo juicio oficial: Uber y la familia llegaron a un acuerdo.</a:t>
+              <a:t>Operarios que omiten protocolos de seguridad para cumplir la cuota</a:t>
             </a:r>
             <a:endParaRPr lang="en-US" sz="1400" dirty="0"/>
-          </a:p>
-        </p:txBody>
-      </p:sp>
-      <p:sp>
-        <p:nvSpPr>
-          <p:cNvPr id="13" name="Text 10"/>
-          <p:cNvSpPr txBox="1"/>
-          <p:nvPr/>
-        </p:nvSpPr>
-        <p:spPr>
-          <a:xfrm>
-            <a:off x="457200" y="4709160"/>
-            <a:ext cx="5486400" cy="274320"/>
-          </a:xfrm>
-          <a:prstGeom prst="rect">
-            <a:avLst/>
-          </a:prstGeom>
-          <a:noFill/>
-          <a:ln/>
-        </p:spPr>
-        <p:txBody>
-          <a:bodyPr wrap="square" lIns="0" tIns="0" rIns="0" bIns="0" rtlCol="0" anchor="t"/>
-          <a:lstStyle/>
-          <a:p>
-            <a:pPr indent="0" marL="0">
-              <a:buNone/>
-            </a:pPr>
-            <a:r>
-              <a:rPr lang="en-US" sz="1000" dirty="0">
-                <a:solidFill>
-                  <a:schemeClr val="accent5"/>
-                </a:solidFill>
-              </a:rPr>
-              <a:t>Fuente: Cano (2018), El País</a:t>
-            </a:r>
-            <a:endParaRPr lang="en-US" sz="1000" dirty="0"/>
           </a:p>
         </p:txBody>
       </p:sp>
@@ -5796,66 +5544,24 @@
           <a:bodyPr wrap="square" lIns="0" tIns="0" rIns="0" bIns="0" rtlCol="0" anchor="ctr"/>
           <a:lstStyle/>
           <a:p>
-            <a:pPr algn="l" indent="0" marL="0">
+            <a:pPr algn="ctr" indent="0" marL="0">
               <a:buNone/>
             </a:pPr>
             <a:r>
               <a:rPr lang="en-US" sz="2800" b="1" dirty="0">
                 <a:solidFill>
-                  <a:schemeClr val="tx2"/>
-                </a:solidFill>
-              </a:rPr>
-              <a:t>Tecnología real: sistemas WMS y TMS</a:t>
+                  <a:schemeClr val="bg1"/>
+                </a:solidFill>
+              </a:rPr>
+              <a:t>Postura del equipo</a:t>
             </a:r>
             <a:endParaRPr lang="en-US" sz="2800" dirty="0"/>
           </a:p>
         </p:txBody>
-      </p:sp>
-      <p:sp>
-        <p:nvSpPr>
-          <p:cNvPr id="3" name="Shape 1"/>
-          <p:cNvSpPr/>
-          <p:nvPr/>
-        </p:nvSpPr>
-        <p:spPr>
-          <a:xfrm>
-            <a:off x="457200" y="1143000"/>
-            <a:ext cx="4023360" cy="2926080"/>
-          </a:xfrm>
-          <a:prstGeom prst="roundRect">
-            <a:avLst>
-              <a:gd name="adj" fmla="val 3750"/>
-            </a:avLst>
-          </a:prstGeom>
-          <a:solidFill>
-            <a:schemeClr val="bg2"/>
-          </a:solidFill>
-          <a:ln/>
-        </p:spPr>
-      </p:sp>
-      <p:sp>
-        <p:nvSpPr>
-          <p:cNvPr id="4" name="Shape 2"/>
-          <p:cNvSpPr/>
-          <p:nvPr/>
-        </p:nvSpPr>
-        <p:spPr>
-          <a:xfrm>
-            <a:off x="685800" y="1325880"/>
-            <a:ext cx="685800" cy="685800"/>
-          </a:xfrm>
-          <a:prstGeom prst="ellipse">
-            <a:avLst/>
-          </a:prstGeom>
-          <a:solidFill>
-            <a:schemeClr val="tx2"/>
-          </a:solidFill>
-          <a:ln/>
-        </p:spPr>
       </p:sp>
       <p:pic>
         <p:nvPicPr>
-          <p:cNvPr id="5" name="Image 0" descr="preencoded.png">    </p:cNvPr>
+          <p:cNvPr id="3" name="Image 0" descr="preencoded.png">    </p:cNvPr>
           <p:cNvPicPr>
             <a:picLocks noChangeAspect="1"/>
           </p:cNvPicPr>
@@ -5869,14 +5575,72 @@
         </p:blipFill>
         <p:spPr>
           <a:xfrm>
-            <a:off x="857250" y="1497330"/>
-            <a:ext cx="342900" cy="342900"/>
+            <a:off x="4023360" y="1051560"/>
+            <a:ext cx="1097280" cy="1097280"/>
           </a:xfrm>
           <a:prstGeom prst="rect">
             <a:avLst/>
           </a:prstGeom>
         </p:spPr>
       </p:pic>
+      <p:sp>
+        <p:nvSpPr>
+          <p:cNvPr id="4" name="Shape 1"/>
+          <p:cNvSpPr/>
+          <p:nvPr/>
+        </p:nvSpPr>
+        <p:spPr>
+          <a:xfrm>
+            <a:off x="457200" y="2331720"/>
+            <a:ext cx="3840480" cy="1417320"/>
+          </a:xfrm>
+          <a:prstGeom prst="roundRect">
+            <a:avLst>
+              <a:gd name="adj" fmla="val 7742"/>
+            </a:avLst>
+          </a:prstGeom>
+          <a:solidFill>
+            <a:schemeClr val="accent4"/>
+          </a:solidFill>
+          <a:ln/>
+        </p:spPr>
+      </p:sp>
+      <p:sp>
+        <p:nvSpPr>
+          <p:cNvPr id="5" name="Text 2"/>
+          <p:cNvSpPr txBox="1"/>
+          <p:nvPr/>
+        </p:nvSpPr>
+        <p:spPr>
+          <a:xfrm>
+            <a:off x="731520" y="2468880"/>
+            <a:ext cx="3291840" cy="411480"/>
+          </a:xfrm>
+          <a:prstGeom prst="rect">
+            <a:avLst/>
+          </a:prstGeom>
+          <a:noFill/>
+          <a:ln/>
+        </p:spPr>
+        <p:txBody>
+          <a:bodyPr wrap="square" lIns="0" tIns="0" rIns="0" bIns="0" rtlCol="0" anchor="t"/>
+          <a:lstStyle/>
+          <a:p>
+            <a:pPr indent="0" marL="0">
+              <a:buNone/>
+            </a:pPr>
+            <a:r>
+              <a:rPr lang="en-US" sz="2000" b="1" dirty="0">
+                <a:solidFill>
+                  <a:schemeClr val="bg1"/>
+                </a:solidFill>
+              </a:rPr>
+              <a:t>Fortalece</a:t>
+            </a:r>
+            <a:endParaRPr lang="en-US" sz="2000" dirty="0"/>
+          </a:p>
+        </p:txBody>
+      </p:sp>
       <p:sp>
         <p:nvSpPr>
           <p:cNvPr id="6" name="Text 3"/>
@@ -5885,8 +5649,8 @@
         </p:nvSpPr>
         <p:spPr>
           <a:xfrm>
-            <a:off x="1508760" y="1463040"/>
-            <a:ext cx="2834640" cy="411480"/>
+            <a:off x="731520" y="2926080"/>
+            <a:ext cx="3291840" cy="731520"/>
           </a:xfrm>
           <a:prstGeom prst="rect">
             <a:avLst/>
@@ -5902,52 +5666,38 @@
               <a:buNone/>
             </a:pPr>
             <a:r>
-              <a:rPr lang="en-US" sz="1600" b="1" dirty="0">
-                <a:solidFill>
-                  <a:schemeClr val="tx2"/>
-                </a:solidFill>
-              </a:rPr>
-              <a:t>WMS · Gestión de Almacenes</a:t>
-            </a:r>
-            <a:endParaRPr lang="en-US" sz="1600" dirty="0"/>
-          </a:p>
-        </p:txBody>
-      </p:sp>
-      <p:sp>
-        <p:nvSpPr>
-          <p:cNvPr id="7" name="Text 4"/>
-          <p:cNvSpPr txBox="1"/>
-          <p:nvPr/>
-        </p:nvSpPr>
-        <p:spPr>
-          <a:xfrm>
-            <a:off x="685800" y="2148840"/>
-            <a:ext cx="3566160" cy="640080"/>
-          </a:xfrm>
-          <a:prstGeom prst="rect">
-            <a:avLst/>
-          </a:prstGeom>
-          <a:noFill/>
-          <a:ln/>
-        </p:spPr>
-        <p:txBody>
-          <a:bodyPr wrap="square" lIns="0" tIns="0" rIns="0" bIns="0" rtlCol="0" anchor="t"/>
-          <a:lstStyle/>
-          <a:p>
-            <a:pPr indent="0" marL="0">
-              <a:buNone/>
-            </a:pPr>
-            <a:r>
-              <a:rPr lang="en-US" sz="1300" i="1" dirty="0">
-                <a:solidFill>
-                  <a:schemeClr val="tx1"/>
-                </a:solidFill>
-              </a:rPr>
-              <a:t>Gestiona los flujos físicos dentro del almacén y los muelles.</a:t>
-            </a:r>
-            <a:endParaRPr lang="en-US" sz="1300" dirty="0"/>
-          </a:p>
-        </p:txBody>
+              <a:rPr lang="en-US" sz="1400" dirty="0">
+                <a:solidFill>
+                  <a:schemeClr val="bg1"/>
+                </a:solidFill>
+              </a:rPr>
+              <a:t>La eficiencia, la rentabilidad y la especialización técnica del sector logístico.</a:t>
+            </a:r>
+            <a:endParaRPr lang="en-US" sz="1400" dirty="0"/>
+          </a:p>
+        </p:txBody>
+      </p:sp>
+      <p:sp>
+        <p:nvSpPr>
+          <p:cNvPr id="7" name="Shape 4"/>
+          <p:cNvSpPr/>
+          <p:nvPr/>
+        </p:nvSpPr>
+        <p:spPr>
+          <a:xfrm>
+            <a:off x="4846320" y="2331720"/>
+            <a:ext cx="3840480" cy="1417320"/>
+          </a:xfrm>
+          <a:prstGeom prst="roundRect">
+            <a:avLst>
+              <a:gd name="adj" fmla="val 7742"/>
+            </a:avLst>
+          </a:prstGeom>
+          <a:solidFill>
+            <a:schemeClr val="accent3"/>
+          </a:solidFill>
+          <a:ln/>
+        </p:spPr>
       </p:sp>
       <p:sp>
         <p:nvSpPr>
@@ -5957,8 +5707,8 @@
         </p:nvSpPr>
         <p:spPr>
           <a:xfrm>
-            <a:off x="685800" y="2834640"/>
-            <a:ext cx="3566160" cy="1097280"/>
+            <a:off x="5120640" y="2468880"/>
+            <a:ext cx="3291840" cy="411480"/>
           </a:xfrm>
           <a:prstGeom prst="rect">
             <a:avLst/>
@@ -5970,137 +5720,31 @@
           <a:bodyPr wrap="square" lIns="0" tIns="0" rIns="0" bIns="0" rtlCol="0" anchor="t"/>
           <a:lstStyle/>
           <a:p>
-            <a:pPr marL="342900" indent="-342900">
-              <a:spcAft>
-                <a:spcPts val="400"/>
-              </a:spcAft>
-              <a:buSzPct val="100000"/>
-              <a:buChar char="•"/>
-            </a:pPr>
-            <a:r>
-              <a:rPr lang="en-US" sz="1300" dirty="0">
-                <a:solidFill>
-                  <a:schemeClr val="tx1"/>
-                </a:solidFill>
-              </a:rPr>
-              <a:t>Mayor visibilidad de inventarios</a:t>
-            </a:r>
-            <a:endParaRPr lang="en-US" sz="1300" dirty="0"/>
-          </a:p>
-          <a:p>
-            <a:pPr marL="342900" indent="-342900">
-              <a:spcAft>
-                <a:spcPts val="400"/>
-              </a:spcAft>
-              <a:buSzPct val="100000"/>
-              <a:buChar char="•"/>
-            </a:pPr>
-            <a:r>
-              <a:rPr lang="en-US" sz="1300" dirty="0">
-                <a:solidFill>
-                  <a:schemeClr val="tx1"/>
-                </a:solidFill>
-              </a:rPr>
-              <a:t>Optimización de procesos</a:t>
-            </a:r>
-            <a:endParaRPr lang="en-US" sz="1300" dirty="0"/>
-          </a:p>
-          <a:p>
-            <a:pPr marL="342900" indent="-342900">
-              <a:spcAft>
-                <a:spcPts val="400"/>
-              </a:spcAft>
-              <a:buSzPct val="100000"/>
-              <a:buChar char="•"/>
-            </a:pPr>
-            <a:r>
-              <a:rPr lang="en-US" sz="1300" dirty="0">
-                <a:solidFill>
-                  <a:schemeClr val="tx1"/>
-                </a:solidFill>
-              </a:rPr>
-              <a:t>Menos tareas de bajo valor</a:t>
-            </a:r>
-            <a:endParaRPr lang="en-US" sz="1300" dirty="0"/>
-          </a:p>
-        </p:txBody>
-      </p:sp>
-      <p:sp>
-        <p:nvSpPr>
-          <p:cNvPr id="9" name="Shape 6"/>
-          <p:cNvSpPr/>
-          <p:nvPr/>
-        </p:nvSpPr>
-        <p:spPr>
-          <a:xfrm>
-            <a:off x="4663440" y="1143000"/>
-            <a:ext cx="4023360" cy="2926080"/>
-          </a:xfrm>
-          <a:prstGeom prst="roundRect">
-            <a:avLst>
-              <a:gd name="adj" fmla="val 3750"/>
-            </a:avLst>
-          </a:prstGeom>
-          <a:solidFill>
-            <a:schemeClr val="bg2"/>
-          </a:solidFill>
-          <a:ln/>
-        </p:spPr>
-      </p:sp>
-      <p:sp>
-        <p:nvSpPr>
-          <p:cNvPr id="10" name="Shape 7"/>
-          <p:cNvSpPr/>
-          <p:nvPr/>
-        </p:nvSpPr>
-        <p:spPr>
-          <a:xfrm>
-            <a:off x="4892040" y="1325880"/>
-            <a:ext cx="685800" cy="685800"/>
-          </a:xfrm>
-          <a:prstGeom prst="ellipse">
-            <a:avLst/>
-          </a:prstGeom>
-          <a:solidFill>
-            <a:schemeClr val="accent2"/>
-          </a:solidFill>
-          <a:ln/>
-        </p:spPr>
-      </p:sp>
-      <p:pic>
-        <p:nvPicPr>
-          <p:cNvPr id="11" name="Image 1" descr="preencoded.png">    </p:cNvPr>
-          <p:cNvPicPr>
-            <a:picLocks noChangeAspect="1"/>
-          </p:cNvPicPr>
-          <p:nvPr/>
-        </p:nvPicPr>
-        <p:blipFill>
-          <a:blip r:embed="rId2"/>
-          <a:stretch>
-            <a:fillRect/>
-          </a:stretch>
-        </p:blipFill>
-        <p:spPr>
-          <a:xfrm>
-            <a:off x="5063490" y="1497330"/>
-            <a:ext cx="342900" cy="342900"/>
-          </a:xfrm>
-          <a:prstGeom prst="rect">
-            <a:avLst/>
-          </a:prstGeom>
-        </p:spPr>
-      </p:pic>
-      <p:sp>
-        <p:nvSpPr>
-          <p:cNvPr id="12" name="Text 8"/>
+            <a:pPr indent="0" marL="0">
+              <a:buNone/>
+            </a:pPr>
+            <a:r>
+              <a:rPr lang="en-US" sz="2000" b="1" dirty="0">
+                <a:solidFill>
+                  <a:schemeClr val="bg1"/>
+                </a:solidFill>
+              </a:rPr>
+              <a:t>Amenaza</a:t>
+            </a:r>
+            <a:endParaRPr lang="en-US" sz="2000" dirty="0"/>
+          </a:p>
+        </p:txBody>
+      </p:sp>
+      <p:sp>
+        <p:nvSpPr>
+          <p:cNvPr id="9" name="Text 6"/>
           <p:cNvSpPr txBox="1"/>
           <p:nvPr/>
         </p:nvSpPr>
         <p:spPr>
           <a:xfrm>
-            <a:off x="5715000" y="1463040"/>
-            <a:ext cx="2834640" cy="411480"/>
+            <a:off x="5120640" y="2926080"/>
+            <a:ext cx="3291840" cy="731520"/>
           </a:xfrm>
           <a:prstGeom prst="rect">
             <a:avLst/>
@@ -6116,27 +5760,27 @@
               <a:buNone/>
             </a:pPr>
             <a:r>
-              <a:rPr lang="en-US" sz="1600" b="1" dirty="0">
-                <a:solidFill>
-                  <a:schemeClr val="tx2"/>
-                </a:solidFill>
-              </a:rPr>
-              <a:t>TMS · Gestión del Transporte</a:t>
-            </a:r>
-            <a:endParaRPr lang="en-US" sz="1600" dirty="0"/>
-          </a:p>
-        </p:txBody>
-      </p:sp>
-      <p:sp>
-        <p:nvSpPr>
-          <p:cNvPr id="13" name="Text 9"/>
+              <a:rPr lang="en-US" sz="1400" dirty="0">
+                <a:solidFill>
+                  <a:schemeClr val="bg1"/>
+                </a:solidFill>
+              </a:rPr>
+              <a:t>La seguridad física, la autonomía y la estabilidad laboral del personal operativo.</a:t>
+            </a:r>
+            <a:endParaRPr lang="en-US" sz="1400" dirty="0"/>
+          </a:p>
+        </p:txBody>
+      </p:sp>
+      <p:sp>
+        <p:nvSpPr>
+          <p:cNvPr id="10" name="Text 7"/>
           <p:cNvSpPr txBox="1"/>
           <p:nvPr/>
         </p:nvSpPr>
         <p:spPr>
           <a:xfrm>
-            <a:off x="4892040" y="2148840"/>
-            <a:ext cx="3566160" cy="640080"/>
+            <a:off x="457200" y="3977640"/>
+            <a:ext cx="8229600" cy="457200"/>
           </a:xfrm>
           <a:prstGeom prst="rect">
             <a:avLst/>
@@ -6148,166 +5792,18 @@
           <a:bodyPr wrap="square" lIns="0" tIns="0" rIns="0" bIns="0" rtlCol="0" anchor="t"/>
           <a:lstStyle/>
           <a:p>
-            <a:pPr indent="0" marL="0">
-              <a:buNone/>
-            </a:pPr>
-            <a:r>
-              <a:rPr lang="en-US" sz="1300" i="1" dirty="0">
-                <a:solidFill>
-                  <a:schemeClr val="tx1"/>
-                </a:solidFill>
-              </a:rPr>
-              <a:t>Consolida envíos, planifica rutas, asigna recursos y supervisa entregas.</a:t>
-            </a:r>
-            <a:endParaRPr lang="en-US" sz="1300" dirty="0"/>
-          </a:p>
-        </p:txBody>
-      </p:sp>
-      <p:sp>
-        <p:nvSpPr>
-          <p:cNvPr id="14" name="Text 10"/>
-          <p:cNvSpPr txBox="1"/>
-          <p:nvPr/>
-        </p:nvSpPr>
-        <p:spPr>
-          <a:xfrm>
-            <a:off x="4892040" y="2834640"/>
-            <a:ext cx="3566160" cy="1097280"/>
-          </a:xfrm>
-          <a:prstGeom prst="rect">
-            <a:avLst/>
-          </a:prstGeom>
-          <a:noFill/>
-          <a:ln/>
-        </p:spPr>
-        <p:txBody>
-          <a:bodyPr wrap="square" lIns="0" tIns="0" rIns="0" bIns="0" rtlCol="0" anchor="t"/>
-          <a:lstStyle/>
-          <a:p>
-            <a:pPr marL="342900" indent="-342900">
-              <a:spcAft>
-                <a:spcPts val="400"/>
-              </a:spcAft>
-              <a:buSzPct val="100000"/>
-              <a:buChar char="•"/>
-            </a:pPr>
-            <a:r>
-              <a:rPr lang="en-US" sz="1300" dirty="0">
-                <a:solidFill>
-                  <a:schemeClr val="tx1"/>
-                </a:solidFill>
-              </a:rPr>
-              <a:t>Menores costos de transporte</a:t>
-            </a:r>
-            <a:endParaRPr lang="en-US" sz="1300" dirty="0"/>
-          </a:p>
-          <a:p>
-            <a:pPr marL="342900" indent="-342900">
-              <a:spcAft>
-                <a:spcPts val="400"/>
-              </a:spcAft>
-              <a:buSzPct val="100000"/>
-              <a:buChar char="•"/>
-            </a:pPr>
-            <a:r>
-              <a:rPr lang="en-US" sz="1300" dirty="0">
-                <a:solidFill>
-                  <a:schemeClr val="tx1"/>
-                </a:solidFill>
-              </a:rPr>
-              <a:t>Mejor trazabilidad de envíos</a:t>
-            </a:r>
-            <a:endParaRPr lang="en-US" sz="1300" dirty="0"/>
-          </a:p>
-          <a:p>
-            <a:pPr marL="342900" indent="-342900">
-              <a:spcAft>
-                <a:spcPts val="400"/>
-              </a:spcAft>
-              <a:buSzPct val="100000"/>
-              <a:buChar char="•"/>
-            </a:pPr>
-            <a:r>
-              <a:rPr lang="en-US" sz="1300" dirty="0">
-                <a:solidFill>
-                  <a:schemeClr val="tx1"/>
-                </a:solidFill>
-              </a:rPr>
-              <a:t>Mayor seguridad en procesos</a:t>
-            </a:r>
-            <a:endParaRPr lang="en-US" sz="1300" dirty="0"/>
-          </a:p>
-        </p:txBody>
-      </p:sp>
-      <p:sp>
-        <p:nvSpPr>
-          <p:cNvPr id="15" name="Text 11"/>
-          <p:cNvSpPr txBox="1"/>
-          <p:nvPr/>
-        </p:nvSpPr>
-        <p:spPr>
-          <a:xfrm>
-            <a:off x="457200" y="4206240"/>
-            <a:ext cx="8229600" cy="365760"/>
-          </a:xfrm>
-          <a:prstGeom prst="rect">
-            <a:avLst/>
-          </a:prstGeom>
-          <a:noFill/>
-          <a:ln/>
-        </p:spPr>
-        <p:txBody>
-          <a:bodyPr wrap="square" lIns="0" tIns="0" rIns="0" bIns="0" rtlCol="0" anchor="t"/>
-          <a:lstStyle/>
-          <a:p>
-            <a:pPr indent="0" marL="0">
-              <a:buNone/>
-            </a:pPr>
-            <a:r>
-              <a:rPr lang="en-US" sz="1400" b="1" dirty="0">
-                <a:solidFill>
-                  <a:schemeClr val="accent2"/>
-                </a:solidFill>
-              </a:rPr>
-              <a:t>Integrados: más productividad y menos errores en toda la cadena de suministro.</a:t>
-            </a:r>
-            <a:endParaRPr lang="en-US" sz="1400" dirty="0"/>
-          </a:p>
-        </p:txBody>
-      </p:sp>
-      <p:sp>
-        <p:nvSpPr>
-          <p:cNvPr id="16" name="Text 12"/>
-          <p:cNvSpPr txBox="1"/>
-          <p:nvPr/>
-        </p:nvSpPr>
-        <p:spPr>
-          <a:xfrm>
-            <a:off x="457200" y="4709160"/>
-            <a:ext cx="5486400" cy="274320"/>
-          </a:xfrm>
-          <a:prstGeom prst="rect">
-            <a:avLst/>
-          </a:prstGeom>
-          <a:noFill/>
-          <a:ln/>
-        </p:spPr>
-        <p:txBody>
-          <a:bodyPr wrap="square" lIns="0" tIns="0" rIns="0" bIns="0" rtlCol="0" anchor="t"/>
-          <a:lstStyle/>
-          <a:p>
-            <a:pPr indent="0" marL="0">
-              <a:buNone/>
-            </a:pPr>
-            <a:r>
-              <a:rPr lang="en-US" sz="1000" dirty="0">
-                <a:solidFill>
-                  <a:schemeClr val="accent5"/>
-                </a:solidFill>
-              </a:rPr>
-              <a:t>Fuente: Desnos (2026), Shiptify</a:t>
-            </a:r>
-            <a:endParaRPr lang="en-US" sz="1000" dirty="0"/>
+            <a:pPr algn="ctr" indent="0" marL="0">
+              <a:buNone/>
+            </a:pPr>
+            <a:r>
+              <a:rPr lang="en-US" sz="1700" i="1" dirty="0">
+                <a:solidFill>
+                  <a:schemeClr val="accent1"/>
+                </a:solidFill>
+              </a:rPr>
+              <a:t>…si la optimización algorítmica se antepone a la ética y al bienestar humano.</a:t>
+            </a:r>
+            <a:endParaRPr lang="en-US" sz="1700" dirty="0"/>
           </a:p>
         </p:txBody>
       </p:sp>
@@ -6341,7 +5837,7 @@
             <a:lvl1pPr>
               <a:defRPr sz="1000">
                 <a:solidFill>
-                  <a:schemeClr val="accent5"/>
+                  <a:schemeClr val="accent6"/>
                 </a:solidFill>
               </a:defRPr>
             </a:lvl1pPr>
@@ -6413,7 +5909,7 @@
                   <a:schemeClr val="tx2"/>
                 </a:solidFill>
               </a:rPr>
-              <a:t>Beneficio concreto: menos costos y errores</a:t>
+              <a:t>Referencias</a:t>
             </a:r>
             <a:endParaRPr lang="en-US" sz="2800" dirty="0"/>
           </a:p>
@@ -6427,8 +5923,8 @@
         </p:nvSpPr>
         <p:spPr>
           <a:xfrm>
-            <a:off x="457200" y="1051560"/>
-            <a:ext cx="8229600" cy="457200"/>
+            <a:off x="457200" y="1097280"/>
+            <a:ext cx="8229600" cy="3566160"/>
           </a:xfrm>
           <a:prstGeom prst="rect">
             <a:avLst/>
@@ -6441,502 +5937,139 @@
           <a:lstStyle/>
           <a:p>
             <a:pPr indent="0" marL="0">
-              <a:buNone/>
-            </a:pPr>
-            <a:r>
-              <a:rPr lang="en-US" sz="1500" dirty="0">
+              <a:spcAft>
+                <a:spcPts val="600"/>
+              </a:spcAft>
+              <a:buNone/>
+            </a:pPr>
+            <a:r>
+              <a:rPr lang="en-US" sz="1100" dirty="0">
                 <a:solidFill>
                   <a:schemeClr val="tx1"/>
                 </a:solidFill>
               </a:rPr>
-              <a:t>Reducción de costos operativos al optimizar tiempos y minimizar errores en inventarios y envíos.</a:t>
-            </a:r>
-            <a:endParaRPr lang="en-US" sz="1500" dirty="0"/>
-          </a:p>
-        </p:txBody>
-      </p:sp>
-      <p:sp>
-        <p:nvSpPr>
-          <p:cNvPr id="4" name="Shape 2"/>
-          <p:cNvSpPr/>
-          <p:nvPr/>
-        </p:nvSpPr>
-        <p:spPr>
-          <a:xfrm>
-            <a:off x="457200" y="1737360"/>
-            <a:ext cx="1517904" cy="2377440"/>
-          </a:xfrm>
-          <a:prstGeom prst="roundRect">
-            <a:avLst>
-              <a:gd name="adj" fmla="val 7229"/>
-            </a:avLst>
-          </a:prstGeom>
-          <a:solidFill>
-            <a:schemeClr val="tx2"/>
-          </a:solidFill>
-          <a:ln/>
-        </p:spPr>
-      </p:sp>
-      <p:sp>
-        <p:nvSpPr>
-          <p:cNvPr id="5" name="Text 3"/>
-          <p:cNvSpPr txBox="1"/>
-          <p:nvPr/>
-        </p:nvSpPr>
-        <p:spPr>
-          <a:xfrm>
-            <a:off x="502920" y="2011680"/>
-            <a:ext cx="1426464" cy="640080"/>
-          </a:xfrm>
-          <a:prstGeom prst="rect">
-            <a:avLst/>
-          </a:prstGeom>
-          <a:noFill/>
-          <a:ln/>
-        </p:spPr>
-        <p:txBody>
-          <a:bodyPr wrap="square" lIns="0" tIns="0" rIns="0" bIns="0" rtlCol="0" anchor="t"/>
-          <a:lstStyle/>
-          <a:p>
-            <a:pPr algn="ctr" indent="0" marL="0">
-              <a:buNone/>
-            </a:pPr>
-            <a:r>
-              <a:rPr lang="en-US" sz="2400" b="1" dirty="0">
-                <a:solidFill>
-                  <a:schemeClr val="accent1"/>
-                </a:solidFill>
-                <a:latin typeface="Arial" pitchFamily="34" charset="0"/>
-                <a:ea typeface="Arial" pitchFamily="34" charset="-122"/>
-                <a:cs typeface="Arial" pitchFamily="34" charset="-120"/>
-              </a:rPr>
-              <a:t>70–90%</a:t>
-            </a:r>
-            <a:endParaRPr lang="en-US" sz="2400" dirty="0"/>
-          </a:p>
-        </p:txBody>
-      </p:sp>
-      <p:sp>
-        <p:nvSpPr>
-          <p:cNvPr id="6" name="Text 4"/>
-          <p:cNvSpPr txBox="1"/>
-          <p:nvPr/>
-        </p:nvSpPr>
-        <p:spPr>
-          <a:xfrm>
-            <a:off x="594360" y="2788920"/>
-            <a:ext cx="1243584" cy="1188720"/>
-          </a:xfrm>
-          <a:prstGeom prst="rect">
-            <a:avLst/>
-          </a:prstGeom>
-          <a:noFill/>
-          <a:ln/>
-        </p:spPr>
-        <p:txBody>
-          <a:bodyPr wrap="square" lIns="0" tIns="0" rIns="0" bIns="0" rtlCol="0" anchor="t"/>
-          <a:lstStyle/>
-          <a:p>
-            <a:pPr algn="ctr" indent="0" marL="0">
-              <a:buNone/>
-            </a:pPr>
-            <a:r>
-              <a:rPr lang="en-US" sz="1300" dirty="0">
-                <a:solidFill>
-                  <a:schemeClr val="bg1"/>
-                </a:solidFill>
-              </a:rPr>
-              <a:t>menos errores en preparación y despacho</a:t>
-            </a:r>
-            <a:endParaRPr lang="en-US" sz="1300" dirty="0"/>
-          </a:p>
-        </p:txBody>
-      </p:sp>
-      <p:sp>
-        <p:nvSpPr>
-          <p:cNvPr id="7" name="Shape 5"/>
-          <p:cNvSpPr/>
-          <p:nvPr/>
-        </p:nvSpPr>
-        <p:spPr>
-          <a:xfrm>
-            <a:off x="2135124" y="1737360"/>
-            <a:ext cx="1517904" cy="2377440"/>
-          </a:xfrm>
-          <a:prstGeom prst="roundRect">
-            <a:avLst>
-              <a:gd name="adj" fmla="val 7229"/>
-            </a:avLst>
-          </a:prstGeom>
-          <a:solidFill>
-            <a:schemeClr val="bg2"/>
-          </a:solidFill>
-          <a:ln/>
-        </p:spPr>
-      </p:sp>
-      <p:sp>
-        <p:nvSpPr>
-          <p:cNvPr id="8" name="Text 6"/>
-          <p:cNvSpPr txBox="1"/>
-          <p:nvPr/>
-        </p:nvSpPr>
-        <p:spPr>
-          <a:xfrm>
-            <a:off x="2180844" y="2011680"/>
-            <a:ext cx="1426464" cy="640080"/>
-          </a:xfrm>
-          <a:prstGeom prst="rect">
-            <a:avLst/>
-          </a:prstGeom>
-          <a:noFill/>
-          <a:ln/>
-        </p:spPr>
-        <p:txBody>
-          <a:bodyPr wrap="square" lIns="0" tIns="0" rIns="0" bIns="0" rtlCol="0" anchor="t"/>
-          <a:lstStyle/>
-          <a:p>
-            <a:pPr algn="ctr" indent="0" marL="0">
-              <a:buNone/>
-            </a:pPr>
-            <a:r>
-              <a:rPr lang="en-US" sz="2400" b="1" dirty="0">
-                <a:solidFill>
-                  <a:schemeClr val="accent2"/>
-                </a:solidFill>
-                <a:latin typeface="Arial" pitchFamily="34" charset="0"/>
-                <a:ea typeface="Arial" pitchFamily="34" charset="-122"/>
-                <a:cs typeface="Arial" pitchFamily="34" charset="-120"/>
-              </a:rPr>
-              <a:t>30–50%</a:t>
-            </a:r>
-            <a:endParaRPr lang="en-US" sz="2400" dirty="0"/>
-          </a:p>
-        </p:txBody>
-      </p:sp>
-      <p:sp>
-        <p:nvSpPr>
-          <p:cNvPr id="9" name="Text 7"/>
-          <p:cNvSpPr txBox="1"/>
-          <p:nvPr/>
-        </p:nvSpPr>
-        <p:spPr>
-          <a:xfrm>
-            <a:off x="2272284" y="2788920"/>
-            <a:ext cx="1243584" cy="1188720"/>
-          </a:xfrm>
-          <a:prstGeom prst="rect">
-            <a:avLst/>
-          </a:prstGeom>
-          <a:noFill/>
-          <a:ln/>
-        </p:spPr>
-        <p:txBody>
-          <a:bodyPr wrap="square" lIns="0" tIns="0" rIns="0" bIns="0" rtlCol="0" anchor="t"/>
-          <a:lstStyle/>
-          <a:p>
-            <a:pPr algn="ctr" indent="0" marL="0">
-              <a:buNone/>
-            </a:pPr>
-            <a:r>
-              <a:rPr lang="en-US" sz="1300" dirty="0">
+              <a:t>Cano, R. J. (2018, 20 marzo). Primer atropello mortal de un coche sin conductor. El País.</a:t>
+            </a:r>
+            <a:endParaRPr lang="en-US" sz="1100" dirty="0"/>
+          </a:p>
+          <a:p>
+            <a:pPr indent="0" marL="0">
+              <a:spcAft>
+                <a:spcPts val="600"/>
+              </a:spcAft>
+              <a:buNone/>
+            </a:pPr>
+            <a:r>
+              <a:rPr lang="en-US" sz="1100" dirty="0">
                 <a:solidFill>
                   <a:schemeClr val="tx1"/>
                 </a:solidFill>
               </a:rPr>
-              <a:t>menos tiempos operativos</a:t>
-            </a:r>
-            <a:endParaRPr lang="en-US" sz="1300" dirty="0"/>
-          </a:p>
-        </p:txBody>
-      </p:sp>
-      <p:sp>
-        <p:nvSpPr>
-          <p:cNvPr id="10" name="Shape 8"/>
-          <p:cNvSpPr/>
-          <p:nvPr/>
-        </p:nvSpPr>
-        <p:spPr>
-          <a:xfrm>
-            <a:off x="3813048" y="1737360"/>
-            <a:ext cx="1517904" cy="2377440"/>
-          </a:xfrm>
-          <a:prstGeom prst="roundRect">
-            <a:avLst>
-              <a:gd name="adj" fmla="val 7229"/>
-            </a:avLst>
-          </a:prstGeom>
-          <a:solidFill>
-            <a:schemeClr val="bg2"/>
-          </a:solidFill>
-          <a:ln/>
-        </p:spPr>
-      </p:sp>
-      <p:sp>
-        <p:nvSpPr>
-          <p:cNvPr id="11" name="Text 9"/>
-          <p:cNvSpPr txBox="1"/>
-          <p:nvPr/>
-        </p:nvSpPr>
-        <p:spPr>
-          <a:xfrm>
-            <a:off x="3858768" y="2011680"/>
-            <a:ext cx="1426464" cy="640080"/>
-          </a:xfrm>
-          <a:prstGeom prst="rect">
-            <a:avLst/>
-          </a:prstGeom>
-          <a:noFill/>
-          <a:ln/>
-        </p:spPr>
-        <p:txBody>
-          <a:bodyPr wrap="square" lIns="0" tIns="0" rIns="0" bIns="0" rtlCol="0" anchor="t"/>
-          <a:lstStyle/>
-          <a:p>
-            <a:pPr algn="ctr" indent="0" marL="0">
-              <a:buNone/>
-            </a:pPr>
-            <a:r>
-              <a:rPr lang="en-US" sz="2400" b="1" dirty="0">
-                <a:solidFill>
-                  <a:schemeClr val="accent2"/>
-                </a:solidFill>
-                <a:latin typeface="Arial" pitchFamily="34" charset="0"/>
-                <a:ea typeface="Arial" pitchFamily="34" charset="-122"/>
-                <a:cs typeface="Arial" pitchFamily="34" charset="-120"/>
-              </a:rPr>
-              <a:t>25–60%</a:t>
-            </a:r>
-            <a:endParaRPr lang="en-US" sz="2400" dirty="0"/>
-          </a:p>
-        </p:txBody>
-      </p:sp>
-      <p:sp>
-        <p:nvSpPr>
-          <p:cNvPr id="12" name="Text 10"/>
-          <p:cNvSpPr txBox="1"/>
-          <p:nvPr/>
-        </p:nvSpPr>
-        <p:spPr>
-          <a:xfrm>
-            <a:off x="3950208" y="2788920"/>
-            <a:ext cx="1243584" cy="1188720"/>
-          </a:xfrm>
-          <a:prstGeom prst="rect">
-            <a:avLst/>
-          </a:prstGeom>
-          <a:noFill/>
-          <a:ln/>
-        </p:spPr>
-        <p:txBody>
-          <a:bodyPr wrap="square" lIns="0" tIns="0" rIns="0" bIns="0" rtlCol="0" anchor="t"/>
-          <a:lstStyle/>
-          <a:p>
-            <a:pPr algn="ctr" indent="0" marL="0">
-              <a:buNone/>
-            </a:pPr>
-            <a:r>
-              <a:rPr lang="en-US" sz="1300" dirty="0">
+              <a:t>Desnos, A. (2026, 9 octubre). WMS y TMS: una combinación ganadora para la cadena de suministro. Shiptify.</a:t>
+            </a:r>
+            <a:endParaRPr lang="en-US" sz="1100" dirty="0"/>
+          </a:p>
+          <a:p>
+            <a:pPr indent="0" marL="0">
+              <a:spcAft>
+                <a:spcPts val="600"/>
+              </a:spcAft>
+              <a:buNone/>
+            </a:pPr>
+            <a:r>
+              <a:rPr lang="en-US" sz="1100" dirty="0">
                 <a:solidFill>
                   <a:schemeClr val="tx1"/>
                 </a:solidFill>
               </a:rPr>
-              <a:t>más productividad</a:t>
-            </a:r>
-            <a:endParaRPr lang="en-US" sz="1300" dirty="0"/>
-          </a:p>
-        </p:txBody>
-      </p:sp>
-      <p:sp>
-        <p:nvSpPr>
-          <p:cNvPr id="13" name="Shape 11"/>
-          <p:cNvSpPr/>
-          <p:nvPr/>
-        </p:nvSpPr>
-        <p:spPr>
-          <a:xfrm>
-            <a:off x="5490972" y="1737360"/>
-            <a:ext cx="1517904" cy="2377440"/>
-          </a:xfrm>
-          <a:prstGeom prst="roundRect">
-            <a:avLst>
-              <a:gd name="adj" fmla="val 7229"/>
-            </a:avLst>
-          </a:prstGeom>
-          <a:solidFill>
-            <a:schemeClr val="bg2"/>
-          </a:solidFill>
-          <a:ln/>
-        </p:spPr>
-      </p:sp>
-      <p:sp>
-        <p:nvSpPr>
-          <p:cNvPr id="14" name="Text 12"/>
-          <p:cNvSpPr txBox="1"/>
-          <p:nvPr/>
-        </p:nvSpPr>
-        <p:spPr>
-          <a:xfrm>
-            <a:off x="5536692" y="2011680"/>
-            <a:ext cx="1426464" cy="640080"/>
-          </a:xfrm>
-          <a:prstGeom prst="rect">
-            <a:avLst/>
-          </a:prstGeom>
-          <a:noFill/>
-          <a:ln/>
-        </p:spPr>
-        <p:txBody>
-          <a:bodyPr wrap="square" lIns="0" tIns="0" rIns="0" bIns="0" rtlCol="0" anchor="t"/>
-          <a:lstStyle/>
-          <a:p>
-            <a:pPr algn="ctr" indent="0" marL="0">
-              <a:buNone/>
-            </a:pPr>
-            <a:r>
-              <a:rPr lang="en-US" sz="2400" b="1" dirty="0">
-                <a:solidFill>
-                  <a:schemeClr val="accent2"/>
-                </a:solidFill>
-                <a:latin typeface="Arial" pitchFamily="34" charset="0"/>
-                <a:ea typeface="Arial" pitchFamily="34" charset="-122"/>
-                <a:cs typeface="Arial" pitchFamily="34" charset="-120"/>
-              </a:rPr>
-              <a:t>20–40%</a:t>
-            </a:r>
-            <a:endParaRPr lang="en-US" sz="2400" dirty="0"/>
-          </a:p>
-        </p:txBody>
-      </p:sp>
-      <p:sp>
-        <p:nvSpPr>
-          <p:cNvPr id="15" name="Text 13"/>
-          <p:cNvSpPr txBox="1"/>
-          <p:nvPr/>
-        </p:nvSpPr>
-        <p:spPr>
-          <a:xfrm>
-            <a:off x="5628132" y="2788920"/>
-            <a:ext cx="1243584" cy="1188720"/>
-          </a:xfrm>
-          <a:prstGeom prst="rect">
-            <a:avLst/>
-          </a:prstGeom>
-          <a:noFill/>
-          <a:ln/>
-        </p:spPr>
-        <p:txBody>
-          <a:bodyPr wrap="square" lIns="0" tIns="0" rIns="0" bIns="0" rtlCol="0" anchor="t"/>
-          <a:lstStyle/>
-          <a:p>
-            <a:pPr algn="ctr" indent="0" marL="0">
-              <a:buNone/>
-            </a:pPr>
-            <a:r>
-              <a:rPr lang="en-US" sz="1300" dirty="0">
+              <a:t>Gjuarez. (2026, 14 septiembre). Transporte y Logística: una carrera con futuro, innovación y propósito. UCJC Madrid.</a:t>
+            </a:r>
+            <a:endParaRPr lang="en-US" sz="1100" dirty="0"/>
+          </a:p>
+          <a:p>
+            <a:pPr indent="0" marL="0">
+              <a:spcAft>
+                <a:spcPts val="600"/>
+              </a:spcAft>
+              <a:buNone/>
+            </a:pPr>
+            <a:r>
+              <a:rPr lang="en-US" sz="1100" dirty="0">
                 <a:solidFill>
                   <a:schemeClr val="tx1"/>
                 </a:solidFill>
               </a:rPr>
-              <a:t>optimización del esfuerzo humano</a:t>
-            </a:r>
-            <a:endParaRPr lang="en-US" sz="1300" dirty="0"/>
-          </a:p>
-        </p:txBody>
-      </p:sp>
-      <p:sp>
-        <p:nvSpPr>
-          <p:cNvPr id="16" name="Shape 14"/>
-          <p:cNvSpPr/>
-          <p:nvPr/>
-        </p:nvSpPr>
-        <p:spPr>
-          <a:xfrm>
-            <a:off x="7168896" y="1737360"/>
-            <a:ext cx="1517904" cy="2377440"/>
-          </a:xfrm>
-          <a:prstGeom prst="roundRect">
-            <a:avLst>
-              <a:gd name="adj" fmla="val 7229"/>
-            </a:avLst>
-          </a:prstGeom>
-          <a:solidFill>
-            <a:schemeClr val="bg2"/>
-          </a:solidFill>
-          <a:ln/>
-        </p:spPr>
-      </p:sp>
-      <p:sp>
-        <p:nvSpPr>
-          <p:cNvPr id="17" name="Text 15"/>
-          <p:cNvSpPr txBox="1"/>
-          <p:nvPr/>
-        </p:nvSpPr>
-        <p:spPr>
-          <a:xfrm>
-            <a:off x="7214616" y="2011680"/>
-            <a:ext cx="1426464" cy="640080"/>
-          </a:xfrm>
-          <a:prstGeom prst="rect">
-            <a:avLst/>
-          </a:prstGeom>
-          <a:noFill/>
-          <a:ln/>
-        </p:spPr>
-        <p:txBody>
-          <a:bodyPr wrap="square" lIns="0" tIns="0" rIns="0" bIns="0" rtlCol="0" anchor="t"/>
-          <a:lstStyle/>
-          <a:p>
-            <a:pPr algn="ctr" indent="0" marL="0">
-              <a:buNone/>
-            </a:pPr>
-            <a:r>
-              <a:rPr lang="en-US" sz="2400" b="1" dirty="0">
-                <a:solidFill>
-                  <a:schemeClr val="accent2"/>
-                </a:solidFill>
-                <a:latin typeface="Arial" pitchFamily="34" charset="0"/>
-                <a:ea typeface="Arial" pitchFamily="34" charset="-122"/>
-                <a:cs typeface="Arial" pitchFamily="34" charset="-120"/>
-              </a:rPr>
-              <a:t>10–25%</a:t>
-            </a:r>
-            <a:endParaRPr lang="en-US" sz="2400" dirty="0"/>
-          </a:p>
-        </p:txBody>
-      </p:sp>
-      <p:sp>
-        <p:nvSpPr>
-          <p:cNvPr id="18" name="Text 16"/>
-          <p:cNvSpPr txBox="1"/>
-          <p:nvPr/>
-        </p:nvSpPr>
-        <p:spPr>
-          <a:xfrm>
-            <a:off x="7306056" y="2788920"/>
-            <a:ext cx="1243584" cy="1188720"/>
-          </a:xfrm>
-          <a:prstGeom prst="rect">
-            <a:avLst/>
-          </a:prstGeom>
-          <a:noFill/>
-          <a:ln/>
-        </p:spPr>
-        <p:txBody>
-          <a:bodyPr wrap="square" lIns="0" tIns="0" rIns="0" bIns="0" rtlCol="0" anchor="t"/>
-          <a:lstStyle/>
-          <a:p>
-            <a:pPr algn="ctr" indent="0" marL="0">
-              <a:buNone/>
-            </a:pPr>
-            <a:r>
-              <a:rPr lang="en-US" sz="1300" dirty="0">
+              <a:t>InfoJobs. (s. f.). Ofertas de trabajo: almacenes automatizados.</a:t>
+            </a:r>
+            <a:endParaRPr lang="en-US" sz="1100" dirty="0"/>
+          </a:p>
+          <a:p>
+            <a:pPr indent="0" marL="0">
+              <a:spcAft>
+                <a:spcPts val="600"/>
+              </a:spcAft>
+              <a:buNone/>
+            </a:pPr>
+            <a:r>
+              <a:rPr lang="en-US" sz="1100" dirty="0">
                 <a:solidFill>
                   <a:schemeClr val="tx1"/>
                 </a:solidFill>
               </a:rPr>
-              <a:t>menos costos logísticos totales</a:t>
-            </a:r>
-            <a:endParaRPr lang="en-US" sz="1300" dirty="0"/>
+              <a:t>Jamali, L. (2025, 2 agosto). Condenan a Tesla a pagar más de US$200 millones por una falla del piloto automático. BBC News Mundo.</a:t>
+            </a:r>
+            <a:endParaRPr lang="en-US" sz="1100" dirty="0"/>
+          </a:p>
+          <a:p>
+            <a:pPr indent="0" marL="0">
+              <a:spcAft>
+                <a:spcPts val="600"/>
+              </a:spcAft>
+              <a:buNone/>
+            </a:pPr>
+            <a:r>
+              <a:rPr lang="en-US" sz="1100" dirty="0">
+                <a:solidFill>
+                  <a:schemeClr val="tx1"/>
+                </a:solidFill>
+              </a:rPr>
+              <a:t>Marcari, D. (2026, 3 marzo). Who is Responsible for an Accident With a Self-driving Car? Marcari Russotto Spencer &amp; Balaban.</a:t>
+            </a:r>
+            <a:endParaRPr lang="en-US" sz="1100" dirty="0"/>
+          </a:p>
+          <a:p>
+            <a:pPr indent="0" marL="0">
+              <a:spcAft>
+                <a:spcPts val="600"/>
+              </a:spcAft>
+              <a:buNone/>
+            </a:pPr>
+            <a:r>
+              <a:rPr lang="en-US" sz="1100" dirty="0">
+                <a:solidFill>
+                  <a:schemeClr val="tx1"/>
+                </a:solidFill>
+              </a:rPr>
+              <a:t>Computrabajo México. (s. f.). Trabajo de automatización y control en Guadalajara, Jalisco.</a:t>
+            </a:r>
+            <a:endParaRPr lang="en-US" sz="1100" dirty="0"/>
+          </a:p>
+          <a:p>
+            <a:pPr indent="0" marL="0">
+              <a:spcAft>
+                <a:spcPts val="600"/>
+              </a:spcAft>
+              <a:buNone/>
+            </a:pPr>
+            <a:r>
+              <a:rPr lang="en-US" sz="1100" dirty="0">
+                <a:solidFill>
+                  <a:schemeClr val="tx1"/>
+                </a:solidFill>
+              </a:rPr>
+              <a:t>William Mattar Accident Lawyers. (2026, 21 septiembre). Responsabilidad en un accidente con un coche autónomo.</a:t>
+            </a:r>
+            <a:endParaRPr lang="en-US" sz="1100" dirty="0"/>
           </a:p>
         </p:txBody>
       </p:sp>
@@ -6980,564 +6113,6 @@
             <a:fld id="{F7021451-1387-4CA6-816F-3879F97B5CBC}" type="slidenum">
               <a:rPr b="0" lang="en-US"/>
               <a:t>8</a:t>
-            </a:fld>
-            <a:endParaRPr lang="en-US"/>
-          </a:p>
-        </p:txBody>
-      </p:sp>
-    </p:spTree>
-  </p:cSld>
-  <p:clrMapOvr>
-    <a:masterClrMapping/>
-  </p:clrMapOvr>
-</p:sld>
-</file>
-
-<file path=ppt/slides/slide9.xml><?xml version="1.0" encoding="utf-8"?>
-<p:sld xmlns:a="http://schemas.openxmlformats.org/drawingml/2006/main" xmlns:r="http://schemas.openxmlformats.org/officeDocument/2006/relationships" xmlns:p="http://schemas.openxmlformats.org/presentationml/2006/main">
-  <p:cSld name="Slide 9">
-    <p:spTree>
-      <p:nvGrpSpPr>
-        <p:cNvPr id="1" name=""/>
-        <p:cNvGrpSpPr/>
-        <p:nvPr/>
-      </p:nvGrpSpPr>
-      <p:grpSpPr>
-        <a:xfrm>
-          <a:off x="0" y="0"/>
-          <a:ext cx="0" cy="0"/>
-          <a:chOff x="0" y="0"/>
-          <a:chExt cx="0" cy="0"/>
-        </a:xfrm>
-      </p:grpSpPr>
-      <p:sp>
-        <p:nvSpPr>
-          <p:cNvPr id="2" name="Text 0"/>
-          <p:cNvSpPr/>
-          <p:nvPr>
-            <p:ph idx="100" type="title" hasCustomPrompt="1"/>
-          </p:nvPr>
-        </p:nvSpPr>
-        <p:spPr>
-          <a:xfrm>
-            <a:off x="457200" y="274320"/>
-            <a:ext cx="8229600" cy="685800"/>
-          </a:xfrm>
-          <a:prstGeom prst="rect">
-            <a:avLst/>
-          </a:prstGeom>
-          <a:noFill/>
-          <a:ln/>
-        </p:spPr>
-        <p:txBody>
-          <a:bodyPr wrap="square" lIns="0" tIns="0" rIns="0" bIns="0" rtlCol="0" anchor="ctr"/>
-          <a:lstStyle/>
-          <a:p>
-            <a:pPr algn="l" indent="0" marL="0">
-              <a:buNone/>
-            </a:pPr>
-            <a:r>
-              <a:rPr lang="en-US" sz="2800" b="1" dirty="0">
-                <a:solidFill>
-                  <a:schemeClr val="tx2"/>
-                </a:solidFill>
-              </a:rPr>
-              <a:t>Dilema ético: eficiencia vs. seguridad física</a:t>
-            </a:r>
-            <a:endParaRPr lang="en-US" sz="2800" dirty="0"/>
-          </a:p>
-        </p:txBody>
-      </p:sp>
-      <p:sp>
-        <p:nvSpPr>
-          <p:cNvPr id="3" name="Shape 1"/>
-          <p:cNvSpPr/>
-          <p:nvPr/>
-        </p:nvSpPr>
-        <p:spPr>
-          <a:xfrm>
-            <a:off x="457200" y="1143000"/>
-            <a:ext cx="4023360" cy="3337560"/>
-          </a:xfrm>
-          <a:prstGeom prst="roundRect">
-            <a:avLst>
-              <a:gd name="adj" fmla="val 3288"/>
-            </a:avLst>
-          </a:prstGeom>
-          <a:solidFill>
-            <a:schemeClr val="bg2"/>
-          </a:solidFill>
-          <a:ln/>
-        </p:spPr>
-      </p:sp>
-      <p:sp>
-        <p:nvSpPr>
-          <p:cNvPr id="4" name="Shape 2"/>
-          <p:cNvSpPr/>
-          <p:nvPr/>
-        </p:nvSpPr>
-        <p:spPr>
-          <a:xfrm>
-            <a:off x="685800" y="1325880"/>
-            <a:ext cx="685800" cy="685800"/>
-          </a:xfrm>
-          <a:prstGeom prst="ellipse">
-            <a:avLst/>
-          </a:prstGeom>
-          <a:solidFill>
-            <a:schemeClr val="accent3"/>
-          </a:solidFill>
-          <a:ln/>
-        </p:spPr>
-      </p:sp>
-      <p:pic>
-        <p:nvPicPr>
-          <p:cNvPr id="5" name="Image 0" descr="preencoded.png">    </p:cNvPr>
-          <p:cNvPicPr>
-            <a:picLocks noChangeAspect="1"/>
-          </p:cNvPicPr>
-          <p:nvPr/>
-        </p:nvPicPr>
-        <p:blipFill>
-          <a:blip r:embed="rId1"/>
-          <a:stretch>
-            <a:fillRect/>
-          </a:stretch>
-        </p:blipFill>
-        <p:spPr>
-          <a:xfrm>
-            <a:off x="857250" y="1497330"/>
-            <a:ext cx="342900" cy="342900"/>
-          </a:xfrm>
-          <a:prstGeom prst="rect">
-            <a:avLst/>
-          </a:prstGeom>
-        </p:spPr>
-      </p:pic>
-      <p:sp>
-        <p:nvSpPr>
-          <p:cNvPr id="6" name="Text 3"/>
-          <p:cNvSpPr txBox="1"/>
-          <p:nvPr/>
-        </p:nvSpPr>
-        <p:spPr>
-          <a:xfrm>
-            <a:off x="1508760" y="1481328"/>
-            <a:ext cx="2834640" cy="411480"/>
-          </a:xfrm>
-          <a:prstGeom prst="rect">
-            <a:avLst/>
-          </a:prstGeom>
-          <a:noFill/>
-          <a:ln/>
-        </p:spPr>
-        <p:txBody>
-          <a:bodyPr wrap="square" lIns="0" tIns="0" rIns="0" bIns="0" rtlCol="0" anchor="t"/>
-          <a:lstStyle/>
-          <a:p>
-            <a:pPr indent="0" marL="0">
-              <a:buNone/>
-            </a:pPr>
-            <a:r>
-              <a:rPr lang="en-US" sz="1600" b="1" dirty="0">
-                <a:solidFill>
-                  <a:schemeClr val="tx2"/>
-                </a:solidFill>
-              </a:rPr>
-              <a:t>La presión del algoritmo</a:t>
-            </a:r>
-            <a:endParaRPr lang="en-US" sz="1600" dirty="0"/>
-          </a:p>
-        </p:txBody>
-      </p:sp>
-      <p:sp>
-        <p:nvSpPr>
-          <p:cNvPr id="7" name="Text 4"/>
-          <p:cNvSpPr txBox="1"/>
-          <p:nvPr/>
-        </p:nvSpPr>
-        <p:spPr>
-          <a:xfrm>
-            <a:off x="685800" y="2194560"/>
-            <a:ext cx="3611880" cy="1005840"/>
-          </a:xfrm>
-          <a:prstGeom prst="rect">
-            <a:avLst/>
-          </a:prstGeom>
-          <a:noFill/>
-          <a:ln/>
-        </p:spPr>
-        <p:txBody>
-          <a:bodyPr wrap="square" lIns="0" tIns="0" rIns="0" bIns="0" rtlCol="0" anchor="t"/>
-          <a:lstStyle/>
-          <a:p>
-            <a:pPr indent="0" marL="0">
-              <a:buNone/>
-            </a:pPr>
-            <a:r>
-              <a:rPr lang="en-US" sz="1400" dirty="0">
-                <a:solidFill>
-                  <a:schemeClr val="tx1"/>
-                </a:solidFill>
-              </a:rPr>
-              <a:t>WMS y TMS fijan tiempos de ruta y ritmos de preparación pensados para el software, no para las personas.</a:t>
-            </a:r>
-            <a:endParaRPr lang="en-US" sz="1400" dirty="0"/>
-          </a:p>
-        </p:txBody>
-      </p:sp>
-      <p:sp>
-        <p:nvSpPr>
-          <p:cNvPr id="8" name="Text 5"/>
-          <p:cNvSpPr txBox="1"/>
-          <p:nvPr/>
-        </p:nvSpPr>
-        <p:spPr>
-          <a:xfrm>
-            <a:off x="685800" y="3200400"/>
-            <a:ext cx="3611880" cy="1097280"/>
-          </a:xfrm>
-          <a:prstGeom prst="rect">
-            <a:avLst/>
-          </a:prstGeom>
-          <a:noFill/>
-          <a:ln/>
-        </p:spPr>
-        <p:txBody>
-          <a:bodyPr wrap="square" lIns="0" tIns="0" rIns="0" bIns="0" rtlCol="0" anchor="t"/>
-          <a:lstStyle/>
-          <a:p>
-            <a:pPr indent="0" marL="0">
-              <a:buNone/>
-            </a:pPr>
-            <a:r>
-              <a:rPr lang="en-US" sz="1300" i="1" dirty="0">
-                <a:solidFill>
-                  <a:schemeClr val="accent2"/>
-                </a:solidFill>
-              </a:rPr>
-              <a:t>En México, Estafeta, DHL y Grupo Traxion no usan vehículos autónomos: la presión del tiempo recae en el conductor.</a:t>
-            </a:r>
-            <a:endParaRPr lang="en-US" sz="1300" dirty="0"/>
-          </a:p>
-        </p:txBody>
-      </p:sp>
-      <p:sp>
-        <p:nvSpPr>
-          <p:cNvPr id="9" name="Text 6"/>
-          <p:cNvSpPr txBox="1"/>
-          <p:nvPr/>
-        </p:nvSpPr>
-        <p:spPr>
-          <a:xfrm>
-            <a:off x="4846320" y="1188720"/>
-            <a:ext cx="3840480" cy="365760"/>
-          </a:xfrm>
-          <a:prstGeom prst="rect">
-            <a:avLst/>
-          </a:prstGeom>
-          <a:noFill/>
-          <a:ln/>
-        </p:spPr>
-        <p:txBody>
-          <a:bodyPr wrap="square" lIns="0" tIns="0" rIns="0" bIns="0" rtlCol="0" anchor="t"/>
-          <a:lstStyle/>
-          <a:p>
-            <a:pPr indent="0" marL="0">
-              <a:buNone/>
-            </a:pPr>
-            <a:r>
-              <a:rPr lang="en-US" sz="1600" b="1" dirty="0">
-                <a:solidFill>
-                  <a:schemeClr val="accent3"/>
-                </a:solidFill>
-              </a:rPr>
-              <a:t>Consecuencias</a:t>
-            </a:r>
-            <a:endParaRPr lang="en-US" sz="1600" dirty="0"/>
-          </a:p>
-        </p:txBody>
-      </p:sp>
-      <p:sp>
-        <p:nvSpPr>
-          <p:cNvPr id="10" name="Shape 7"/>
-          <p:cNvSpPr/>
-          <p:nvPr/>
-        </p:nvSpPr>
-        <p:spPr>
-          <a:xfrm>
-            <a:off x="4846320" y="1691640"/>
-            <a:ext cx="594360" cy="594360"/>
-          </a:xfrm>
-          <a:prstGeom prst="ellipse">
-            <a:avLst/>
-          </a:prstGeom>
-          <a:solidFill>
-            <a:schemeClr val="accent3"/>
-          </a:solidFill>
-          <a:ln/>
-        </p:spPr>
-      </p:sp>
-      <p:pic>
-        <p:nvPicPr>
-          <p:cNvPr id="11" name="Image 1" descr="preencoded.png">    </p:cNvPr>
-          <p:cNvPicPr>
-            <a:picLocks noChangeAspect="1"/>
-          </p:cNvPicPr>
-          <p:nvPr/>
-        </p:nvPicPr>
-        <p:blipFill>
-          <a:blip r:embed="rId2"/>
-          <a:stretch>
-            <a:fillRect/>
-          </a:stretch>
-        </p:blipFill>
-        <p:spPr>
-          <a:xfrm>
-            <a:off x="4994910" y="1840230"/>
-            <a:ext cx="297180" cy="297180"/>
-          </a:xfrm>
-          <a:prstGeom prst="rect">
-            <a:avLst/>
-          </a:prstGeom>
-        </p:spPr>
-      </p:pic>
-      <p:sp>
-        <p:nvSpPr>
-          <p:cNvPr id="12" name="Text 8"/>
-          <p:cNvSpPr txBox="1"/>
-          <p:nvPr/>
-        </p:nvSpPr>
-        <p:spPr>
-          <a:xfrm>
-            <a:off x="5623560" y="1709928"/>
-            <a:ext cx="3063240" cy="594360"/>
-          </a:xfrm>
-          <a:prstGeom prst="rect">
-            <a:avLst/>
-          </a:prstGeom>
-          <a:noFill/>
-          <a:ln/>
-        </p:spPr>
-        <p:txBody>
-          <a:bodyPr wrap="square" lIns="0" tIns="0" rIns="0" bIns="0" rtlCol="0" anchor="ctr"/>
-          <a:lstStyle/>
-          <a:p>
-            <a:pPr indent="0" marL="0">
-              <a:buNone/>
-            </a:pPr>
-            <a:r>
-              <a:rPr lang="en-US" sz="1400" dirty="0">
-                <a:solidFill>
-                  <a:schemeClr val="tx1"/>
-                </a:solidFill>
-              </a:rPr>
-              <a:t>Conductores que manejan fatigados</a:t>
-            </a:r>
-            <a:endParaRPr lang="en-US" sz="1400" dirty="0"/>
-          </a:p>
-        </p:txBody>
-      </p:sp>
-      <p:sp>
-        <p:nvSpPr>
-          <p:cNvPr id="13" name="Shape 9"/>
-          <p:cNvSpPr/>
-          <p:nvPr/>
-        </p:nvSpPr>
-        <p:spPr>
-          <a:xfrm>
-            <a:off x="4846320" y="2606040"/>
-            <a:ext cx="594360" cy="594360"/>
-          </a:xfrm>
-          <a:prstGeom prst="ellipse">
-            <a:avLst/>
-          </a:prstGeom>
-          <a:solidFill>
-            <a:schemeClr val="accent3"/>
-          </a:solidFill>
-          <a:ln/>
-        </p:spPr>
-      </p:sp>
-      <p:pic>
-        <p:nvPicPr>
-          <p:cNvPr id="14" name="Image 2" descr="preencoded.png">    </p:cNvPr>
-          <p:cNvPicPr>
-            <a:picLocks noChangeAspect="1"/>
-          </p:cNvPicPr>
-          <p:nvPr/>
-        </p:nvPicPr>
-        <p:blipFill>
-          <a:blip r:embed="rId3"/>
-          <a:stretch>
-            <a:fillRect/>
-          </a:stretch>
-        </p:blipFill>
-        <p:spPr>
-          <a:xfrm>
-            <a:off x="4994910" y="2754630"/>
-            <a:ext cx="297180" cy="297180"/>
-          </a:xfrm>
-          <a:prstGeom prst="rect">
-            <a:avLst/>
-          </a:prstGeom>
-        </p:spPr>
-      </p:pic>
-      <p:sp>
-        <p:nvSpPr>
-          <p:cNvPr id="15" name="Text 10"/>
-          <p:cNvSpPr txBox="1"/>
-          <p:nvPr/>
-        </p:nvSpPr>
-        <p:spPr>
-          <a:xfrm>
-            <a:off x="5623560" y="2624328"/>
-            <a:ext cx="3063240" cy="594360"/>
-          </a:xfrm>
-          <a:prstGeom prst="rect">
-            <a:avLst/>
-          </a:prstGeom>
-          <a:noFill/>
-          <a:ln/>
-        </p:spPr>
-        <p:txBody>
-          <a:bodyPr wrap="square" lIns="0" tIns="0" rIns="0" bIns="0" rtlCol="0" anchor="ctr"/>
-          <a:lstStyle/>
-          <a:p>
-            <a:pPr indent="0" marL="0">
-              <a:buNone/>
-            </a:pPr>
-            <a:r>
-              <a:rPr lang="en-US" sz="1400" dirty="0">
-                <a:solidFill>
-                  <a:schemeClr val="tx1"/>
-                </a:solidFill>
-              </a:rPr>
-              <a:t>Exceso de los límites de velocidad</a:t>
-            </a:r>
-            <a:endParaRPr lang="en-US" sz="1400" dirty="0"/>
-          </a:p>
-        </p:txBody>
-      </p:sp>
-      <p:sp>
-        <p:nvSpPr>
-          <p:cNvPr id="16" name="Shape 11"/>
-          <p:cNvSpPr/>
-          <p:nvPr/>
-        </p:nvSpPr>
-        <p:spPr>
-          <a:xfrm>
-            <a:off x="4846320" y="3520440"/>
-            <a:ext cx="594360" cy="594360"/>
-          </a:xfrm>
-          <a:prstGeom prst="ellipse">
-            <a:avLst/>
-          </a:prstGeom>
-          <a:solidFill>
-            <a:schemeClr val="accent3"/>
-          </a:solidFill>
-          <a:ln/>
-        </p:spPr>
-      </p:sp>
-      <p:pic>
-        <p:nvPicPr>
-          <p:cNvPr id="17" name="Image 3" descr="preencoded.png">    </p:cNvPr>
-          <p:cNvPicPr>
-            <a:picLocks noChangeAspect="1"/>
-          </p:cNvPicPr>
-          <p:nvPr/>
-        </p:nvPicPr>
-        <p:blipFill>
-          <a:blip r:embed="rId4"/>
-          <a:stretch>
-            <a:fillRect/>
-          </a:stretch>
-        </p:blipFill>
-        <p:spPr>
-          <a:xfrm>
-            <a:off x="4994910" y="3669030"/>
-            <a:ext cx="297180" cy="297180"/>
-          </a:xfrm>
-          <a:prstGeom prst="rect">
-            <a:avLst/>
-          </a:prstGeom>
-        </p:spPr>
-      </p:pic>
-      <p:sp>
-        <p:nvSpPr>
-          <p:cNvPr id="18" name="Text 12"/>
-          <p:cNvSpPr txBox="1"/>
-          <p:nvPr/>
-        </p:nvSpPr>
-        <p:spPr>
-          <a:xfrm>
-            <a:off x="5623560" y="3538728"/>
-            <a:ext cx="3063240" cy="594360"/>
-          </a:xfrm>
-          <a:prstGeom prst="rect">
-            <a:avLst/>
-          </a:prstGeom>
-          <a:noFill/>
-          <a:ln/>
-        </p:spPr>
-        <p:txBody>
-          <a:bodyPr wrap="square" lIns="0" tIns="0" rIns="0" bIns="0" rtlCol="0" anchor="ctr"/>
-          <a:lstStyle/>
-          <a:p>
-            <a:pPr indent="0" marL="0">
-              <a:buNone/>
-            </a:pPr>
-            <a:r>
-              <a:rPr lang="en-US" sz="1400" dirty="0">
-                <a:solidFill>
-                  <a:schemeClr val="tx1"/>
-                </a:solidFill>
-              </a:rPr>
-              <a:t>Operarios que omiten protocolos de seguridad para cumplir la cuota</a:t>
-            </a:r>
-            <a:endParaRPr lang="en-US" sz="1400" dirty="0"/>
-          </a:p>
-        </p:txBody>
-      </p:sp>
-      <p:sp>
-        <p:nvSpPr>
-          <p:cNvPr id="25" name="Slide Number Placeholder 0"/>
-          <p:cNvSpPr>
-            <a:spLocks noGrp="1"/>
-          </p:cNvSpPr>
-          <p:nvPr>
-            <p:ph type="sldNum" sz="quarter" idx="4294967295"/>
-          </p:nvPr>
-        </p:nvSpPr>
-        <p:spPr>
-          <a:xfrm>
-            <a:off x="8412480" y="4754880"/>
-            <a:ext cx="457200" cy="274320"/>
-          </a:xfrm>
-          <a:prstGeom prst="rect">
-            <a:avLst/>
-          </a:prstGeom>
-          <a:extLst>
-            <a:ext uri="{C572A759-6A51-4108-AA02-DFA0A04FC94B}">
-              <ma14:wrappingTextBoxFlag xmlns:ma14="http://schemas.microsoft.com/office/mac/drawingml/2011/main" val="0"/>
-            </a:ext>
-          </a:extLst>
-        </p:spPr>
-        <p:txBody>
-          <a:bodyPr/>
-          <a:lstStyle>
-            <a:lvl1pPr>
-              <a:defRPr sz="1000">
-                <a:solidFill>
-                  <a:schemeClr val="accent5"/>
-                </a:solidFill>
-              </a:defRPr>
-            </a:lvl1pPr>
-          </a:lstStyle>
-          <a:p>
-            <a:pPr algn="l"/>
-            <a:fld id="{F7021451-1387-4CA6-816F-3879F97B5CBC}" type="slidenum">
-              <a:rPr b="0" lang="en-US"/>
-              <a:t>9</a:t>
             </a:fld>
             <a:endParaRPr lang="en-US"/>
           </a:p>
